--- a/week_10/week_10_mql_document_modeling.pptx
+++ b/week_10/week_10_mql_document_modeling.pptx
@@ -36,6 +36,7 @@
     <p:sldId xmlns:r="http://schemas.openxmlformats.org/officeDocument/2006/relationships" id="281" r:id="R1d68ae5902c5481b"/>
     <p:sldId xmlns:r="http://schemas.openxmlformats.org/officeDocument/2006/relationships" id="282" r:id="Rb582db59952e4094"/>
     <p:sldId xmlns:r="http://schemas.openxmlformats.org/officeDocument/2006/relationships" id="283" r:id="R3f91c04cf8d74289"/>
+    <p:sldId xmlns:ns0="http://schemas.openxmlformats.org/officeDocument/2006/relationships" id="284" ns0:id="rId34"/>
   </p:sldIdLst>
   <p:sldSz cx="12192000" cy="6858000"/>
   <p:notesSz cx="6858000" cy="9144000"/>
@@ -2910,6 +2911,76 @@
   </p:cSld>
   <p:clrMapOvr>
     <a:masterClrMapping xmlns:a="http://schemas.openxmlformats.org/drawingml/2006/main"/>
+  </p:clrMapOvr>
+</p:notes>
+</file>
+
+<file path=ppt/notesSlides/notesSlide29.xml><?xml version="1.0" encoding="utf-8"?>
+<p:notes xmlns:a="http://schemas.openxmlformats.org/drawingml/2006/main" xmlns:p="http://schemas.openxmlformats.org/presentationml/2006/main" xmlns:r="http://schemas.openxmlformats.org/officeDocument/2006/relationships">
+  <p:cSld>
+    <p:spTree>
+      <p:nvGrpSpPr>
+        <p:cNvPr id="1" name=""/>
+        <p:cNvGrpSpPr/>
+        <p:nvPr/>
+      </p:nvGrpSpPr>
+      <p:grpSpPr>
+        <a:xfrm>
+          <a:off x="0" y="0"/>
+          <a:ext cx="0" cy="0"/>
+          <a:chOff x="0" y="0"/>
+          <a:chExt cx="0" cy="0"/>
+        </a:xfrm>
+      </p:grpSpPr>
+      <p:sp>
+        <p:nvSpPr>
+          <p:cNvPr id="2" name="Slide Image Placeholder 1"/>
+          <p:cNvSpPr>
+            <a:spLocks noGrp="1"/>
+          </p:cNvSpPr>
+          <p:nvPr>
+            <p:ph type="sldImg" idx="2"/>
+          </p:nvPr>
+        </p:nvSpPr>
+        <p:spPr/>
+      </p:sp>
+      <p:sp>
+        <p:nvSpPr>
+          <p:cNvPr id="3" name="Notes Placeholder 2"/>
+          <p:cNvSpPr>
+            <a:spLocks noGrp="1"/>
+          </p:cNvSpPr>
+          <p:nvPr>
+            <p:ph type="body" idx="3" sz="quarter"/>
+          </p:nvPr>
+        </p:nvSpPr>
+        <p:spPr/>
+        <p:txBody>
+          <a:bodyPr/>
+          <a:lstStyle/>
+          <a:p>
+            <a:r>
+              <a:t>These short animations go with this week's reading. Students can watch them before class to preview the mechanisms, or afterwards to review: Querying inside documents: arrays and $elemMatch (1:12); Did the write do what you meant? (1:06); Embed or reference? Let the workload decide (1:21). Each video is silent with on-screen captions and a subtitle file, and is linked from the Week 10 README. The diagrams are schematic illustrations, not benchmarks.</a:t>
+            </a:r>
+          </a:p>
+        </p:txBody>
+      </p:sp>
+      <p:sp>
+        <p:nvSpPr>
+          <p:cNvPr id="4" name="Slide Number Placeholder 3"/>
+          <p:cNvSpPr>
+            <a:spLocks noGrp="1"/>
+          </p:cNvSpPr>
+          <p:nvPr>
+            <p:ph type="sldNum" idx="5" sz="quarter"/>
+          </p:nvPr>
+        </p:nvSpPr>
+        <p:spPr/>
+      </p:sp>
+    </p:spTree>
+  </p:cSld>
+  <p:clrMapOvr>
+    <a:masterClrMapping/>
   </p:clrMapOvr>
 </p:notes>
 </file>
@@ -16571,6 +16642,451 @@
       </p:ext>
     </p:extLst>
   </p:cSld>
+</p:sld>
+</file>
+
+<file path=ppt/slides/slide29.xml><?xml version="1.0" encoding="utf-8"?>
+<p:sld xmlns:a="http://schemas.openxmlformats.org/drawingml/2006/main" xmlns:p="http://schemas.openxmlformats.org/presentationml/2006/main" xmlns:r="http://schemas.openxmlformats.org/officeDocument/2006/relationships">
+  <p:cSld>
+    <p:bg>
+      <p:bgPr>
+        <a:solidFill>
+          <a:srgbClr val="FCFCFA"/>
+        </a:solidFill>
+        <a:effectLst/>
+      </p:bgPr>
+    </p:bg>
+    <p:spTree>
+      <p:nvGrpSpPr>
+        <p:cNvPr id="1" name=""/>
+        <p:cNvGrpSpPr/>
+        <p:nvPr/>
+      </p:nvGrpSpPr>
+      <p:grpSpPr/>
+      <p:sp>
+        <p:nvSpPr>
+          <p:cNvPr id="2" name="cst4714-videos"/>
+          <p:cNvSpPr txBox="1"/>
+          <p:nvPr/>
+        </p:nvSpPr>
+        <p:spPr>
+          <a:xfrm>
+            <a:off x="0" y="0"/>
+            <a:ext cx="10" cy="10"/>
+          </a:xfrm>
+          <a:prstGeom prst="rect">
+            <a:avLst/>
+          </a:prstGeom>
+          <a:noFill/>
+        </p:spPr>
+        <p:txBody>
+          <a:bodyPr wrap="square" lIns="0" rIns="0" tIns="0" bIns="0" anchor="t">
+            <a:spAutoFit/>
+          </a:bodyPr>
+          <a:lstStyle/>
+          <a:p>
+            <a:pPr algn="l"/>
+            <a:r>
+              <a:rPr sz="1800" b="0">
+                <a:solidFill>
+                  <a:srgbClr val="111827"/>
+                </a:solidFill>
+                <a:latin typeface="Helvetica Neue"/>
+              </a:rPr>
+              <a:t/>
+            </a:r>
+          </a:p>
+        </p:txBody>
+      </p:sp>
+      <p:sp>
+        <p:nvSpPr>
+          <p:cNvPr id="3" name="eyebrow"/>
+          <p:cNvSpPr txBox="1"/>
+          <p:nvPr/>
+        </p:nvSpPr>
+        <p:spPr>
+          <a:xfrm>
+            <a:off x="609600" y="295275"/>
+            <a:ext cx="5715000" cy="228600"/>
+          </a:xfrm>
+          <a:prstGeom prst="rect">
+            <a:avLst/>
+          </a:prstGeom>
+          <a:noFill/>
+        </p:spPr>
+        <p:txBody>
+          <a:bodyPr wrap="square" lIns="0" rIns="0" tIns="0" bIns="0" anchor="t">
+            <a:spAutoFit/>
+          </a:bodyPr>
+          <a:lstStyle/>
+          <a:p>
+            <a:pPr algn="l"/>
+            <a:r>
+              <a:rPr sz="1400" b="1">
+                <a:solidFill>
+                  <a:srgbClr val="BF3E05"/>
+                </a:solidFill>
+                <a:latin typeface="Helvetica Neue"/>
+              </a:rPr>
+              <a:t>WEEK 10  /  CST4714</a:t>
+            </a:r>
+          </a:p>
+        </p:txBody>
+      </p:sp>
+      <p:sp>
+        <p:nvSpPr>
+          <p:cNvPr id="4" name="slide-title"/>
+          <p:cNvSpPr txBox="1"/>
+          <p:nvPr/>
+        </p:nvSpPr>
+        <p:spPr>
+          <a:xfrm>
+            <a:off x="609600" y="619125"/>
+            <a:ext cx="10972800" cy="628650"/>
+          </a:xfrm>
+          <a:prstGeom prst="rect">
+            <a:avLst/>
+          </a:prstGeom>
+          <a:noFill/>
+        </p:spPr>
+        <p:txBody>
+          <a:bodyPr wrap="square" lIns="0" rIns="0" tIns="0" bIns="0" anchor="t">
+            <a:spAutoFit/>
+          </a:bodyPr>
+          <a:lstStyle/>
+          <a:p>
+            <a:pPr algn="l"/>
+            <a:r>
+              <a:rPr sz="3600" b="1">
+                <a:solidFill>
+                  <a:srgbClr val="111827"/>
+                </a:solidFill>
+                <a:latin typeface="Helvetica Neue"/>
+              </a:rPr>
+              <a:t>This week's videos</a:t>
+            </a:r>
+          </a:p>
+        </p:txBody>
+      </p:sp>
+      <p:sp>
+        <p:nvSpPr>
+          <p:cNvPr id="5" name="Rectangle 4"/>
+          <p:cNvSpPr/>
+          <p:nvPr/>
+        </p:nvSpPr>
+        <p:spPr>
+          <a:xfrm>
+            <a:off x="609600" y="1295400"/>
+            <a:ext cx="10972800" cy="9525"/>
+          </a:xfrm>
+          <a:prstGeom prst="rect">
+            <a:avLst/>
+          </a:prstGeom>
+          <a:solidFill>
+            <a:srgbClr val="CBD5E1"/>
+          </a:solidFill>
+          <a:ln>
+            <a:noFill/>
+          </a:ln>
+        </p:spPr>
+        <p:style>
+          <a:lnRef idx="1">
+            <a:schemeClr val="accent1"/>
+          </a:lnRef>
+          <a:fillRef idx="3">
+            <a:schemeClr val="accent1"/>
+          </a:fillRef>
+          <a:effectRef idx="2">
+            <a:schemeClr val="accent1"/>
+          </a:effectRef>
+          <a:fontRef idx="minor">
+            <a:schemeClr val="lt1"/>
+          </a:fontRef>
+        </p:style>
+        <p:txBody>
+          <a:bodyPr rtlCol="0" anchor="ctr"/>
+          <a:lstStyle/>
+          <a:p>
+            <a:pPr algn="ctr"/>
+          </a:p>
+        </p:txBody>
+      </p:sp>
+      <p:sp>
+        <p:nvSpPr>
+          <p:cNvPr id="6" name="slide-number"/>
+          <p:cNvSpPr txBox="1"/>
+          <p:nvPr/>
+        </p:nvSpPr>
+        <p:spPr>
+          <a:xfrm>
+            <a:off x="11125200" y="6467475"/>
+            <a:ext cx="457200" cy="190500"/>
+          </a:xfrm>
+          <a:prstGeom prst="rect">
+            <a:avLst/>
+          </a:prstGeom>
+          <a:noFill/>
+        </p:spPr>
+        <p:txBody>
+          <a:bodyPr wrap="square" lIns="0" rIns="0" tIns="0" bIns="0" anchor="t">
+            <a:spAutoFit/>
+          </a:bodyPr>
+          <a:lstStyle/>
+          <a:p>
+            <a:pPr algn="r"/>
+            <a:r>
+              <a:rPr sz="1200" b="0">
+                <a:solidFill>
+                  <a:srgbClr val="475569"/>
+                </a:solidFill>
+                <a:latin typeface="Helvetica Neue"/>
+              </a:rPr>
+              <a:t>29</a:t>
+            </a:r>
+          </a:p>
+        </p:txBody>
+      </p:sp>
+      <p:pic>
+        <p:nvPicPr>
+          <p:cNvPr id="7" name="video-thumb-1" descr="01_array_queries.png">
+            <a:hlinkClick r:id="rId3"/>
+          </p:cNvPr>
+          <p:cNvPicPr>
+            <a:picLocks noChangeAspect="1"/>
+          </p:cNvPicPr>
+          <p:nvPr/>
+        </p:nvPicPr>
+        <p:blipFill>
+          <a:blip r:embed="rId2"/>
+          <a:stretch>
+            <a:fillRect/>
+          </a:stretch>
+        </p:blipFill>
+        <p:spPr>
+          <a:xfrm>
+            <a:off x="609600" y="1600200"/>
+            <a:ext cx="3454400" cy="1943100"/>
+          </a:xfrm>
+          <a:prstGeom prst="rect">
+            <a:avLst/>
+          </a:prstGeom>
+          <a:ln>
+            <a:solidFill>
+              <a:srgbClr val="CBD5E1"/>
+            </a:solidFill>
+          </a:ln>
+        </p:spPr>
+      </p:pic>
+      <p:sp>
+        <p:nvSpPr>
+          <p:cNvPr id="8" name="video-title-1"/>
+          <p:cNvSpPr txBox="1"/>
+          <p:nvPr/>
+        </p:nvSpPr>
+        <p:spPr>
+          <a:xfrm>
+            <a:off x="609600" y="3623300"/>
+            <a:ext cx="3454400" cy="520000"/>
+          </a:xfrm>
+          <a:prstGeom prst="rect">
+            <a:avLst/>
+          </a:prstGeom>
+          <a:noFill/>
+        </p:spPr>
+        <p:txBody>
+          <a:bodyPr wrap="square" lIns="0" rIns="0" tIns="0" bIns="0" anchor="t">
+            <a:spAutoFit/>
+          </a:bodyPr>
+          <a:lstStyle/>
+          <a:p>
+            <a:pPr algn="l"/>
+            <a:r>
+              <a:rPr sz="1500" b="1">
+                <a:solidFill>
+                  <a:srgbClr val="111827"/>
+                </a:solidFill>
+                <a:latin typeface="Helvetica Neue"/>
+                <a:hlinkClick r:id="rId3"/>
+              </a:rPr>
+              <a:t>▶ Querying inside documents: arrays and $elemMatch  (1:12)</a:t>
+            </a:r>
+          </a:p>
+        </p:txBody>
+      </p:sp>
+      <p:pic>
+        <p:nvPicPr>
+          <p:cNvPr id="9" name="video-thumb-2" descr="02_update_results.png">
+            <a:hlinkClick r:id="rId5"/>
+          </p:cNvPr>
+          <p:cNvPicPr>
+            <a:picLocks noChangeAspect="1"/>
+          </p:cNvPicPr>
+          <p:nvPr/>
+        </p:nvPicPr>
+        <p:blipFill>
+          <a:blip r:embed="rId4"/>
+          <a:stretch>
+            <a:fillRect/>
+          </a:stretch>
+        </p:blipFill>
+        <p:spPr>
+          <a:xfrm>
+            <a:off x="4368800" y="1600200"/>
+            <a:ext cx="3454400" cy="1943100"/>
+          </a:xfrm>
+          <a:prstGeom prst="rect">
+            <a:avLst/>
+          </a:prstGeom>
+          <a:ln>
+            <a:solidFill>
+              <a:srgbClr val="CBD5E1"/>
+            </a:solidFill>
+          </a:ln>
+        </p:spPr>
+      </p:pic>
+      <p:sp>
+        <p:nvSpPr>
+          <p:cNvPr id="10" name="video-title-2"/>
+          <p:cNvSpPr txBox="1"/>
+          <p:nvPr/>
+        </p:nvSpPr>
+        <p:spPr>
+          <a:xfrm>
+            <a:off x="4368800" y="3623300"/>
+            <a:ext cx="3454400" cy="520000"/>
+          </a:xfrm>
+          <a:prstGeom prst="rect">
+            <a:avLst/>
+          </a:prstGeom>
+          <a:noFill/>
+        </p:spPr>
+        <p:txBody>
+          <a:bodyPr wrap="square" lIns="0" rIns="0" tIns="0" bIns="0" anchor="t">
+            <a:spAutoFit/>
+          </a:bodyPr>
+          <a:lstStyle/>
+          <a:p>
+            <a:pPr algn="l"/>
+            <a:r>
+              <a:rPr sz="1500" b="1">
+                <a:solidFill>
+                  <a:srgbClr val="111827"/>
+                </a:solidFill>
+                <a:latin typeface="Helvetica Neue"/>
+                <a:hlinkClick r:id="rId5"/>
+              </a:rPr>
+              <a:t>▶ Did the write do what you meant?  (1:06)</a:t>
+            </a:r>
+          </a:p>
+        </p:txBody>
+      </p:sp>
+      <p:pic>
+        <p:nvPicPr>
+          <p:cNvPr id="11" name="video-thumb-3" descr="03_embed_or_reference.png">
+            <a:hlinkClick r:id="rId7"/>
+          </p:cNvPr>
+          <p:cNvPicPr>
+            <a:picLocks noChangeAspect="1"/>
+          </p:cNvPicPr>
+          <p:nvPr/>
+        </p:nvPicPr>
+        <p:blipFill>
+          <a:blip r:embed="rId6"/>
+          <a:stretch>
+            <a:fillRect/>
+          </a:stretch>
+        </p:blipFill>
+        <p:spPr>
+          <a:xfrm>
+            <a:off x="8128000" y="1600200"/>
+            <a:ext cx="3454400" cy="1943100"/>
+          </a:xfrm>
+          <a:prstGeom prst="rect">
+            <a:avLst/>
+          </a:prstGeom>
+          <a:ln>
+            <a:solidFill>
+              <a:srgbClr val="CBD5E1"/>
+            </a:solidFill>
+          </a:ln>
+        </p:spPr>
+      </p:pic>
+      <p:sp>
+        <p:nvSpPr>
+          <p:cNvPr id="12" name="video-title-3"/>
+          <p:cNvSpPr txBox="1"/>
+          <p:nvPr/>
+        </p:nvSpPr>
+        <p:spPr>
+          <a:xfrm>
+            <a:off x="8128000" y="3623300"/>
+            <a:ext cx="3454400" cy="520000"/>
+          </a:xfrm>
+          <a:prstGeom prst="rect">
+            <a:avLst/>
+          </a:prstGeom>
+          <a:noFill/>
+        </p:spPr>
+        <p:txBody>
+          <a:bodyPr wrap="square" lIns="0" rIns="0" tIns="0" bIns="0" anchor="t">
+            <a:spAutoFit/>
+          </a:bodyPr>
+          <a:lstStyle/>
+          <a:p>
+            <a:pPr algn="l"/>
+            <a:r>
+              <a:rPr sz="1500" b="1">
+                <a:solidFill>
+                  <a:srgbClr val="111827"/>
+                </a:solidFill>
+                <a:latin typeface="Helvetica Neue"/>
+                <a:hlinkClick r:id="rId7"/>
+              </a:rPr>
+              <a:t>▶ Embed or reference? Let the workload decide  (1:21)</a:t>
+            </a:r>
+          </a:p>
+        </p:txBody>
+      </p:sp>
+      <p:sp>
+        <p:nvSpPr>
+          <p:cNvPr id="13" name="videos-note"/>
+          <p:cNvSpPr txBox="1"/>
+          <p:nvPr/>
+        </p:nvSpPr>
+        <p:spPr>
+          <a:xfrm>
+            <a:off x="609600" y="4243300"/>
+            <a:ext cx="10372800" cy="300000"/>
+          </a:xfrm>
+          <a:prstGeom prst="rect">
+            <a:avLst/>
+          </a:prstGeom>
+          <a:noFill/>
+        </p:spPr>
+        <p:txBody>
+          <a:bodyPr wrap="square" lIns="0" rIns="0" tIns="0" bIns="0" anchor="t">
+            <a:spAutoFit/>
+          </a:bodyPr>
+          <a:lstStyle/>
+          <a:p>
+            <a:pPr algn="l"/>
+            <a:r>
+              <a:rPr sz="1200" b="0">
+                <a:solidFill>
+                  <a:srgbClr val="475569"/>
+                </a:solidFill>
+                <a:latin typeface="Helvetica Neue"/>
+              </a:rPr>
+              <a:t>Click a thumbnail to play on GitHub. Silent, with captions and .srt subtitles; diagrams are schematic.</a:t>
+            </a:r>
+          </a:p>
+        </p:txBody>
+      </p:sp>
+    </p:spTree>
+  </p:cSld>
+  <p:clrMapOvr>
+    <a:masterClrMapping/>
+  </p:clrMapOvr>
 </p:sld>
 </file>
 

--- a/week_10/week_10_mql_document_modeling.pptx
+++ b/week_10/week_10_mql_document_modeling.pptx
@@ -470,37 +470,31 @@
           <a:lstStyle xmlns:a="http://schemas.openxmlformats.org/drawingml/2006/main"/>
           <a:p xmlns:a="http://schemas.openxmlformats.org/drawingml/2006/main">
             <a:r>
-              <a:t>Last week we represented the same ticket facts in different JSON shapes. We could read the text and discuss the design, but we had not yet asked a database to retrieve or change those facts. This week we take that next step. Our application is still the support portal. A resident needs to see the right ticket. An agent needs to change that ticket without accidentally changing someone else's request.</a:t>
-            </a:r>
-          </a:p>
-          <a:p xmlns:a="http://schemas.openxmlformats.org/drawingml/2006/main">
-            <a:r>
-              <a:t/>
-            </a:r>
-          </a:p>
-          <a:p xmlns:a="http://schemas.openxmlformats.org/drawingml/2006/main">
-            <a:r>
-              <a:t>In our first meeting we will use a small notebook. Each query will have a visible result that we can compare with the supplied data. We will examine a query that appears reasonable but answers the wrong question about an event array. We will also distinguish finding a document from actually modifying it. Those distinctions are useful when an application reports that a request succeeded but the data looks unchanged.</a:t>
-            </a:r>
-          </a:p>
-          <a:p xmlns:a="http://schemas.openxmlformats.org/drawingml/2006/main">
-            <a:r>
-              <a:t/>
-            </a:r>
-          </a:p>
-          <a:p xmlns:a="http://schemas.openxmlformats.org/drawingml/2006/main">
-            <a:r>
-              <a:t>In our second meeting we will connect these operations to modeling. A ticket page needs current status and recent events, but a person's contact information can change independently and event history can continue to grow. We will compare the work created by different document boundaries.</a:t>
-            </a:r>
-          </a:p>
-          <a:p xmlns:a="http://schemas.openxmlformats.org/drawingml/2006/main">
-            <a:r>
-              <a:t/>
-            </a:r>
-          </a:p>
-          <a:p xmlns:a="http://schemas.openxmlformats.org/drawingml/2006/main">
-            <a:r>
-              <a:t>You do not need to create a complete application this week. The goal is to understand the data operations and explain one design choice using an actual workload. Local notebook mode remains available if your cloud connection is not ready.</a:t>
+              <a:t>Welcome to Week 10. Look at the line in the middle of the slide: a support application must find and change the intended ticket. Not a ticket. The intended one.</a:t>
+            </a:r>
+          </a:p>
+          <a:p xmlns:a="http://schemas.openxmlformats.org/drawingml/2006/main"/>
+          <a:p xmlns:a="http://schemas.openxmlformats.org/drawingml/2006/main">
+            <a:r>
+              <a:t>Last week we took the same ticket facts and wrote them as different JSON shapes. We read them and argued about the design, but no database ever touched them. This week a database does. A resident opens the portal and needs to see their own ticket. An agent changes that ticket and must not change somebody else's request by accident.</a:t>
+            </a:r>
+          </a:p>
+          <a:p xmlns:a="http://schemas.openxmlformats.org/drawingml/2006/main"/>
+          <a:p xmlns:a="http://schemas.openxmlformats.org/drawingml/2006/main">
+            <a:r>
+              <a:t>On Day 1 we work in a small notebook, and every query prints a result we can check against six tickets we can actually see. You will meet a query that looks perfectly reasonable and answers the wrong question about an event array. And you will learn to tell finding a document apart from actually changing it. Why does that matter? Because one of the most confusing bug reports you will ever get is "the app said it worked, but nothing changed."</a:t>
+            </a:r>
+          </a:p>
+          <a:p xmlns:a="http://schemas.openxmlformats.org/drawingml/2006/main"/>
+          <a:p xmlns:a="http://schemas.openxmlformats.org/drawingml/2006/main">
+            <a:r>
+              <a:t>On Day 2 we turn those operations into a design question. A ticket page needs the current status and the recent events. But a person's contact details change on their own schedule, and event history keeps growing. Where each of those facts lives decides how much work every read and every update costs.</a:t>
+            </a:r>
+          </a:p>
+          <a:p xmlns:a="http://schemas.openxmlformats.org/drawingml/2006/main"/>
+          <a:p xmlns:a="http://schemas.openxmlformats.org/drawingml/2006/main">
+            <a:r>
+              <a:t>You are not building an application this week. And if your cloud connection is not ready, the notebook's local mode teaches the same queries.</a:t>
             </a:r>
           </a:p>
         </p:txBody>
@@ -570,54 +564,40 @@
           <a:lstStyle xmlns:a="http://schemas.openxmlformats.org/drawingml/2006/main"/>
           <a:p xmlns:a="http://schemas.openxmlformats.org/drawingml/2006/main">
             <a:r>
-              <a:t>Read the two event rows as separate facts. Event 5001 says that a resident created ticket 1001. Event 5002 says that an agent was associated with the assigned event. Neither row says that an agent created the ticket.</a:t>
-            </a:r>
-          </a:p>
-          <a:p xmlns:a="http://schemas.openxmlformats.org/drawingml/2006/main">
-            <a:r>
-              <a:t/>
-            </a:r>
-          </a:p>
-          <a:p xmlns:a="http://schemas.openxmlformats.org/drawingml/2006/main">
-            <a:r>
-              <a:t>The tempting filter below asks for an events.type value equal to created and an events.actor_role value equal to agent. With these separate dotted predicates, MongoDB can find the created value in one element and the agent value in another element. The ticket satisfies both predicates at the document level.</a:t>
-            </a:r>
-          </a:p>
-          <a:p xmlns:a="http://schemas.openxmlformats.org/drawingml/2006/main">
-            <a:r>
-              <a:t/>
-            </a:r>
-          </a:p>
-          <a:p xmlns:a="http://schemas.openxmlformats.org/drawingml/2006/main">
-            <a:r>
-              <a:t>If our actual application question was whether an agent created the ticket, that is the wrong answer. The query is syntactically valid and MongoDB is following its defined behavior. The error lies in how the query expresses the application's requirement.</a:t>
-            </a:r>
-          </a:p>
-          <a:p xmlns:a="http://schemas.openxmlformats.org/drawingml/2006/main">
-            <a:r>
-              <a:t/>
-            </a:r>
-          </a:p>
-          <a:p xmlns:a="http://schemas.openxmlformats.org/drawingml/2006/main">
-            <a:r>
-              <a:t>This is why a small counterexample is valuable. If every ticket had just one event, the tempting filter might appear to work in every test. We deliberately keep a resident-created event and a distinct agent event in one array so the ambiguity becomes observable.</a:t>
-            </a:r>
-          </a:p>
-          <a:p xmlns:a="http://schemas.openxmlformats.org/drawingml/2006/main">
-            <a:r>
-              <a:t/>
-            </a:r>
-          </a:p>
-          <a:p xmlns:a="http://schemas.openxmlformats.org/drawingml/2006/main">
-            <a:r>
-              <a:t>The same reasoning applies beyond support tickets. A product might have different sizes and prices in different variants. A person might have skills recorded at different proficiency levels. When multiple conditions describe the same related object, our filter must preserve that relationship between the conditions.</a:t>
-            </a:r>
-          </a:p>
-          <a:p xmlns:a="http://schemas.openxmlformats.org/drawingml/2006/main">
-            <a:r>
-              <a:t/>
-            </a:r>
-          </a:p>
+              <a:t>Look at the small table first. Two events on ticket 1001, and they are two separate facts. Event 5001 says a resident created the ticket. Event 5002 says the ticket was assigned, and the actor was an agent. Neither row says an agent created the ticket.</a:t>
+            </a:r>
+          </a:p>
+          <a:p xmlns:a="http://schemas.openxmlformats.org/drawingml/2006/main"/>
+          <a:p xmlns:a="http://schemas.openxmlformats.org/drawingml/2006/main">
+            <a:r>
+              <a:t>Now the filter below. We named it wrong_question on purpose. It asks for events.type equal to created, and events.actor_role equal to agent. It reads like "an event where an agent created the ticket." Watch what happens: ticket 1001 matches. Read the result box. Ticket 1001 matches this filter, but no single event says an agent created it.</a:t>
+            </a:r>
+          </a:p>
+          <a:p xmlns:a="http://schemas.openxmlformats.org/drawingml/2006/main"/>
+          <a:p xmlns:a="http://schemas.openxmlformats.org/drawingml/2006/main">
+            <a:r>
+              <a:t>Why? With two separate dotted conditions, MongoDB is allowed to find created in one element and agent in another. Created comes from 5001. Agent comes from 5002. The document as a whole satisfies both conditions, so it qualifies.</a:t>
+            </a:r>
+          </a:p>
+          <a:p xmlns:a="http://schemas.openxmlformats.org/drawingml/2006/main"/>
+          <a:p xmlns:a="http://schemas.openxmlformats.org/drawingml/2006/main">
+            <a:r>
+              <a:t>Is MongoDB broken? No. The query is valid, and MongoDB did exactly what it defines. The mistake is ours: the query does not say what the application meant.</a:t>
+            </a:r>
+          </a:p>
+          <a:p xmlns:a="http://schemas.openxmlformats.org/drawingml/2006/main"/>
+          <a:p xmlns:a="http://schemas.openxmlformats.org/drawingml/2006/main">
+            <a:r>
+              <a:t>This is why the fixture keeps a resident-created event and a separate agent event in the same array. If every ticket had only one event, this filter would pass every test you ran, and the bug would wait for production. A small counterexample makes it visible.</a:t>
+            </a:r>
+          </a:p>
+          <a:p xmlns:a="http://schemas.openxmlformats.org/drawingml/2006/main"/>
+          <a:p xmlns:a="http://schemas.openxmlformats.org/drawingml/2006/main">
+            <a:r>
+              <a:t>You will see this pattern everywhere: product variants with sizes and prices, people with skills at different levels. When conditions describe one related object, the filter has to keep them together.</a:t>
+            </a:r>
+          </a:p>
+          <a:p xmlns:a="http://schemas.openxmlformats.org/drawingml/2006/main"/>
           <a:p xmlns:a="http://schemas.openxmlformats.org/drawingml/2006/main">
             <a:r>
               <a:t>Sources:</a:t>
@@ -695,54 +675,34 @@
           <a:lstStyle xmlns:a="http://schemas.openxmlformats.org/drawingml/2006/main"/>
           <a:p xmlns:a="http://schemas.openxmlformats.org/drawingml/2006/main">
             <a:r>
-              <a:t>The elemMatch operator puts the two conditions inside one requirement for an array element. We are asking whether the events array contains at least one element whose type is created and whose actor_role is agent. Both conditions must hold in that same event object.</a:t>
-            </a:r>
-          </a:p>
-          <a:p xmlns:a="http://schemas.openxmlformats.org/drawingml/2006/main">
-            <a:r>
-              <a:t/>
-            </a:r>
-          </a:p>
-          <a:p xmlns:a="http://schemas.openxmlformats.org/drawingml/2006/main">
-            <a:r>
-              <a:t>The result is an empty list. That is the correct result for the supplied fixture because every supplied created event has resident as its actor role. An empty answer is not automatically an error. We judge it against the question and the data.</a:t>
-            </a:r>
-          </a:p>
-          <a:p xmlns:a="http://schemas.openxmlformats.org/drawingml/2006/main">
-            <a:r>
-              <a:t/>
-            </a:r>
-          </a:p>
-          <a:p xmlns:a="http://schemas.openxmlformats.org/drawingml/2006/main">
-            <a:r>
-              <a:t>The notebook also asks for a status_changed event whose actor_role is agent. That version does match tickets 1002 and 1003. It shows that elemMatch is not simply a way to make results disappear. It expresses the requirement that related conditions describe one element, and the data may or may not contain such an element.</a:t>
-            </a:r>
-          </a:p>
-          <a:p xmlns:a="http://schemas.openxmlformats.org/drawingml/2006/main">
-            <a:r>
-              <a:t/>
-            </a:r>
-          </a:p>
-          <a:p xmlns:a="http://schemas.openxmlformats.org/drawingml/2006/main">
-            <a:r>
-              <a:t>There is another boundary to remember. ElemMatch in this filter decides whether the ticket document qualifies. It does not automatically trim the returned events array to only the matching event. If the projection includes the full events field, the document can contain other events as well. Shaping array output is a separate operation.</a:t>
-            </a:r>
-          </a:p>
-          <a:p xmlns:a="http://schemas.openxmlformats.org/drawingml/2006/main">
-            <a:r>
-              <a:t/>
-            </a:r>
-          </a:p>
-          <a:p xmlns:a="http://schemas.openxmlformats.org/drawingml/2006/main">
-            <a:r>
-              <a:t>In your explanation, use event IDs and field values rather than only repeating the phrase same element. A concrete pair of rows shows that you understand why the two queries differ.</a:t>
-            </a:r>
-          </a:p>
-          <a:p xmlns:a="http://schemas.openxmlformats.org/drawingml/2006/main">
-            <a:r>
-              <a:t/>
-            </a:r>
-          </a:p>
+              <a:t>Here is the fix. $elemMatch takes both conditions and puts them inside one requirement for a single array element. The question becomes: does the events array contain at least one event whose type is created and whose actor_role is agent, both in that same event?</a:t>
+            </a:r>
+          </a:p>
+          <a:p xmlns:a="http://schemas.openxmlformats.org/drawingml/2006/main"/>
+          <a:p xmlns:a="http://schemas.openxmlformats.org/drawingml/2006/main">
+            <a:r>
+              <a:t>Watch the result. An empty list. Every created event in this fixture has resident as its actor role, so no ticket has an agent-created event. The empty answer is the correct answer. An empty result is not automatically an error. We judge it against the question and the data.</a:t>
+            </a:r>
+          </a:p>
+          <a:p xmlns:a="http://schemas.openxmlformats.org/drawingml/2006/main"/>
+          <a:p xmlns:a="http://schemas.openxmlformats.org/drawingml/2006/main">
+            <a:r>
+              <a:t>Now look at the third box. The notebook also asks for a status_changed event whose actor is an agent. That version returns tickets 1002 and 1003. So $elemMatch is not a trick for making results disappear. It states that related conditions describe one element, and the data either has such an element or it does not.</a:t>
+            </a:r>
+          </a:p>
+          <a:p xmlns:a="http://schemas.openxmlformats.org/drawingml/2006/main"/>
+          <a:p xmlns:a="http://schemas.openxmlformats.org/drawingml/2006/main">
+            <a:r>
+              <a:t>One more boundary, in the last line. $elemMatch in the filter decides whether the ticket qualifies. It does not trim the events array in what comes back. If your projection includes the whole events field, a matching ticket still shows its other, nonmatching events. Shaping array output is a separate operation.</a:t>
+            </a:r>
+          </a:p>
+          <a:p xmlns:a="http://schemas.openxmlformats.org/drawingml/2006/main"/>
+          <a:p xmlns:a="http://schemas.openxmlformats.org/drawingml/2006/main">
+            <a:r>
+              <a:t>When you write your lab explanation, do not just repeat the phrase "same element." Use the event IDs and the field values. Say that created came from event 5001 and agent came from event 5002. A concrete pair of rows shows you understand why the two queries differ.</a:t>
+            </a:r>
+          </a:p>
+          <a:p xmlns:a="http://schemas.openxmlformats.org/drawingml/2006/main"/>
           <a:p xmlns:a="http://schemas.openxmlformats.org/drawingml/2006/main">
             <a:r>
               <a:t>Sources:</a:t>
@@ -820,47 +780,37 @@
           <a:lstStyle xmlns:a="http://schemas.openxmlformats.org/drawingml/2006/main"/>
           <a:p xmlns:a="http://schemas.openxmlformats.org/drawingml/2006/main">
             <a:r>
-              <a:t>We need a safe target for write practice. This block uses ticket 1099 and requires two additional markers: test_record is true and course_fixture is cst4714. The filter is deliberately more specific than a status or category that several real tickets could share.</a:t>
-            </a:r>
-          </a:p>
-          <a:p xmlns:a="http://schemas.openxmlformats.org/drawingml/2006/main">
-            <a:r>
-              <a:t/>
-            </a:r>
-          </a:p>
-          <a:p xmlns:a="http://schemas.openxmlformats.org/drawingml/2006/main">
-            <a:r>
-              <a:t>The first deletion resets only matching test records in our private practice collection. We then insert a new document in status new with an empty events array. The double asterisks copy the fields from test_filter into the new Python dictionary. That syntax is Python dictionary unpacking, not a MongoDB operator. It lets the inserted document carry the same identity and markers that the filter uses.</a:t>
-            </a:r>
-          </a:p>
-          <a:p xmlns:a="http://schemas.openxmlformats.org/drawingml/2006/main">
-            <a:r>
-              <a:t/>
-            </a:r>
-          </a:p>
-          <a:p xmlns:a="http://schemas.openxmlformats.org/drawingml/2006/main">
-            <a:r>
-              <a:t>This setup is an explicit reset. If you run it again, you are starting the write experiment over. To observe a repeated update, run the update cell twice without rerunning this insertion cell between the two executions. Otherwise you would keep recreating the initial state and never observe the second case.</a:t>
-            </a:r>
-          </a:p>
-          <a:p xmlns:a="http://schemas.openxmlformats.org/drawingml/2006/main">
-            <a:r>
-              <a:t/>
-            </a:r>
-          </a:p>
-          <a:p xmlns:a="http://schemas.openxmlformats.org/drawingml/2006/main">
-            <a:r>
-              <a:t>The notebook has also created a unique index on ticket_id. MongoDB's generated underscore id alone would not prevent two documents from sharing our domain ticket number. Protecting ticket_id makes the intended one-ticket target unambiguous within this exercise.</a:t>
-            </a:r>
-          </a:p>
-          <a:p xmlns:a="http://schemas.openxmlformats.org/drawingml/2006/main">
-            <a:r>
-              <a:t/>
-            </a:r>
-          </a:p>
-          <a:p xmlns:a="http://schemas.openxmlformats.org/drawingml/2006/main">
-            <a:r>
-              <a:t>Everything here belongs to a new practice collection. Do not substitute an Atlas sample collection or your final project's production data for this disposable target.</a:t>
+              <a:t>Before we change anything, we need something safe to change. Never practice writes on data you care about.</a:t>
+            </a:r>
+          </a:p>
+          <a:p xmlns:a="http://schemas.openxmlformats.org/drawingml/2006/main"/>
+          <a:p xmlns:a="http://schemas.openxmlformats.org/drawingml/2006/main">
+            <a:r>
+              <a:t>Look at test_filter. Ticket 1099, plus two markers: test_record is True and course_fixture is cst4714. Why three conditions instead of just the ticket number? Because the filter should be far narrower than anything real tickets could share. A status or a category matches many tickets. These markers match only our test.</a:t>
+            </a:r>
+          </a:p>
+          <a:p xmlns:a="http://schemas.openxmlformats.org/drawingml/2006/main"/>
+          <a:p xmlns:a="http://schemas.openxmlformats.org/drawingml/2006/main">
+            <a:r>
+              <a:t>The next line, delete_many with that filter, clears out any earlier copy of the test record, and only the test record, in our private practice collection. Then insert_one creates it fresh, with status new and an empty events array. Notice the two asterisks before test_filter. That is Python dictionary unpacking, not a MongoDB operator. It copies the ticket number and both markers into the new document, so the document we insert carries exactly the identity our filter looks for.</a:t>
+            </a:r>
+          </a:p>
+          <a:p xmlns:a="http://schemas.openxmlformats.org/drawingml/2006/main"/>
+          <a:p xmlns:a="http://schemas.openxmlformats.org/drawingml/2006/main">
+            <a:r>
+              <a:t>This cell is a reset. Every time you run it, the experiment starts over. So when you test a repeated update in a minute, run the update cell twice without rerunning this one in between. Otherwise you keep recreating the starting state and never see the second case.</a:t>
+            </a:r>
+          </a:p>
+          <a:p xmlns:a="http://schemas.openxmlformats.org/drawingml/2006/main"/>
+          <a:p xmlns:a="http://schemas.openxmlformats.org/drawingml/2006/main">
+            <a:r>
+              <a:t>Read the boxes. The notebook also creates a unique index on ticket_id. MongoDB's own underscore id would not stop two documents from sharing ticket number 1099. The unique index does, so our target is unambiguous.</a:t>
+            </a:r>
+          </a:p>
+          <a:p xmlns:a="http://schemas.openxmlformats.org/drawingml/2006/main"/>
+          <a:p xmlns:a="http://schemas.openxmlformats.org/drawingml/2006/main">
+            <a:r>
+              <a:t>No sample database is changed. Never swap in an Atlas sample collection or your project data here.</a:t>
             </a:r>
           </a:p>
         </p:txBody>
@@ -930,54 +880,34 @@
           <a:lstStyle xmlns:a="http://schemas.openxmlformats.org/drawingml/2006/main"/>
           <a:p xmlns:a="http://schemas.openxmlformats.org/drawingml/2006/main">
             <a:r>
-              <a:t>Now we call update_one with the exact test filter and a set operator. The set operator names status and assignee_id. It changes those fields while keeping the other fields in the document. This is different from replacing the whole document with a smaller dictionary.</a:t>
-            </a:r>
-          </a:p>
-          <a:p xmlns:a="http://schemas.openxmlformats.org/drawingml/2006/main">
-            <a:r>
-              <a:t/>
-            </a:r>
-          </a:p>
-          <a:p xmlns:a="http://schemas.openxmlformats.org/drawingml/2006/main">
-            <a:r>
-              <a:t>The first execution finds test ticket 1099 in its initial state and changes the two values. The result reports one matched document and one modified document. The follow-up read shows status in_progress.</a:t>
-            </a:r>
-          </a:p>
-          <a:p xmlns:a="http://schemas.openxmlformats.org/drawingml/2006/main">
-            <a:r>
-              <a:t/>
-            </a:r>
-          </a:p>
-          <a:p xmlns:a="http://schemas.openxmlformats.org/drawingml/2006/main">
-            <a:r>
-              <a:t>Run the same update again, with no intervening reset. The identity and test markers still match the same document, so matched_count is one. But the document already contains the values requested by set. There is no new change to make, so modified_count is zero. The status still reads in_progress.</a:t>
-            </a:r>
-          </a:p>
-          <a:p xmlns:a="http://schemas.openxmlformats.org/drawingml/2006/main">
-            <a:r>
-              <a:t/>
-            </a:r>
-          </a:p>
-          <a:p xmlns:a="http://schemas.openxmlformats.org/drawingml/2006/main">
-            <a:r>
-              <a:t>Those counts answer different questions. A zero modified count alone cannot tell us whether the filter found nothing or the requested values were already present. We inspect matched_count too, then read the state that the application actually cares about.</a:t>
-            </a:r>
-          </a:p>
-          <a:p xmlns:a="http://schemas.openxmlformats.org/drawingml/2006/main">
-            <a:r>
-              <a:t/>
-            </a:r>
-          </a:p>
-          <a:p xmlns:a="http://schemas.openxmlformats.org/drawingml/2006/main">
-            <a:r>
-              <a:t>These counts are document counts, not numbers of individual fields changed. Changing status and assignee_id in one document does not produce a modified count of two. We still modified one document. This distinction will help us interpret write results in larger applications without guessing from an ambiguous zero.</a:t>
-            </a:r>
-          </a:p>
-          <a:p xmlns:a="http://schemas.openxmlformats.org/drawingml/2006/main">
-            <a:r>
-              <a:t/>
-            </a:r>
-          </a:p>
+              <a:t>Now we change the test ticket. update_one with our exact test filter and a $set. The $set names two fields, status and assignee_id. It changes those two and leaves every other field in the document alone. That is very different from replacing the whole document with a smaller dictionary, which would quietly throw away everything you did not mention.</a:t>
+            </a:r>
+          </a:p>
+          <a:p xmlns:a="http://schemas.openxmlformats.org/drawingml/2006/main"/>
+          <a:p xmlns:a="http://schemas.openxmlformats.org/drawingml/2006/main">
+            <a:r>
+              <a:t>Look at the table. First execution: matched one, modified one, and the read-back says in_progress. The filter found test ticket 1099, the values were different, so it changed them.</a:t>
+            </a:r>
+          </a:p>
+          <a:p xmlns:a="http://schemas.openxmlformats.org/drawingml/2006/main"/>
+          <a:p xmlns:a="http://schemas.openxmlformats.org/drawingml/2006/main">
+            <a:r>
+              <a:t>Now watch what happens when I run the exact same cell again, with no reset in between. Matched one. Modified zero. Status still in_progress. The filter still finds the same document. But the document already holds the values $set asks for, so there is nothing to change.</a:t>
+            </a:r>
+          </a:p>
+          <a:p xmlns:a="http://schemas.openxmlformats.org/drawingml/2006/main"/>
+          <a:p xmlns:a="http://schemas.openxmlformats.org/drawingml/2006/main">
+            <a:r>
+              <a:t>Why does this matter? Because those two counts answer different questions. A modified count of zero, by itself, cannot tell you whether the filter found nothing or the values were already there. If you only look at modified_count, you will chase a bug that does not exist. So read matched_count too, and then read back the state the application actually cares about.</a:t>
+            </a:r>
+          </a:p>
+          <a:p xmlns:a="http://schemas.openxmlformats.org/drawingml/2006/main"/>
+          <a:p xmlns:a="http://schemas.openxmlformats.org/drawingml/2006/main">
+            <a:r>
+              <a:t>One more detail. These are document counts, not field counts. We changed two fields, status and assignee_id, in one document, and modified_count is one, not two. That is the habit for the rest of the course: never guess from an ambiguous zero.</a:t>
+            </a:r>
+          </a:p>
+          <a:p xmlns:a="http://schemas.openxmlformats.org/drawingml/2006/main"/>
           <a:p xmlns:a="http://schemas.openxmlformats.org/drawingml/2006/main">
             <a:r>
               <a:t>Sources:</a:t>
@@ -1055,54 +985,34 @@
           <a:lstStyle xmlns:a="http://schemas.openxmlformats.org/drawingml/2006/main"/>
           <a:p xmlns:a="http://schemas.openxmlformats.org/drawingml/2006/main">
             <a:r>
-              <a:t>This operation adds status new to the identity and marker conditions. It expresses an expected current state: change this test ticket to resolved only if it is still new. Our previous operation already moved the document to in_progress.</a:t>
-            </a:r>
-          </a:p>
-          <a:p xmlns:a="http://schemas.openxmlformats.org/drawingml/2006/main">
-            <a:r>
-              <a:t/>
-            </a:r>
-          </a:p>
-          <a:p xmlns:a="http://schemas.openxmlformats.org/drawingml/2006/main">
-            <a:r>
-              <a:t>The result is therefore zero matches and zero modifications. The status remains in_progress. Unlike the preceding repeated set, this request did not find a document satisfying its complete filter. It did not find the document and decide that the replacement value was already present.</a:t>
-            </a:r>
-          </a:p>
-          <a:p xmlns:a="http://schemas.openxmlformats.org/drawingml/2006/main">
-            <a:r>
-              <a:t/>
-            </a:r>
-          </a:p>
-          <a:p xmlns:a="http://schemas.openxmlformats.org/drawingml/2006/main">
-            <a:r>
-              <a:t>An expected-state predicate can be useful when two application actions might otherwise overwrite each other. MongoDB rechecks the condition as part of the single-document write. If an earlier action has already changed the state, a later action with the old expectation can observe that it no longer applies.</a:t>
-            </a:r>
-          </a:p>
-          <a:p xmlns:a="http://schemas.openxmlformats.org/drawingml/2006/main">
-            <a:r>
-              <a:t/>
-            </a:r>
-          </a:p>
-          <a:p xmlns:a="http://schemas.openxmlformats.org/drawingml/2006/main">
-            <a:r>
-              <a:t>The application still needs a policy for that outcome. It might reload the ticket, report that the state changed, or ask the user to reconsider the action. We should not silently treat every zero match as success. Nor should we call every zero match a broken network connection.</a:t>
-            </a:r>
-          </a:p>
-          <a:p xmlns:a="http://schemas.openxmlformats.org/drawingml/2006/main">
-            <a:r>
-              <a:t/>
-            </a:r>
-          </a:p>
-          <a:p xmlns:a="http://schemas.openxmlformats.org/drawingml/2006/main">
-            <a:r>
-              <a:t>This is a small state-transition example, not a complete concurrency or retry protocol. The important beginner skill is to describe what the filter permits and then compare that permission with the state actually stored when the write runs.</a:t>
-            </a:r>
-          </a:p>
-          <a:p xmlns:a="http://schemas.openxmlformats.org/drawingml/2006/main">
-            <a:r>
-              <a:t/>
-            </a:r>
-          </a:p>
+              <a:t>This update adds one more condition to the filter: status must be new. In plain words: change this test ticket to resolved, but only if it is still new. Remember, the previous slide already moved it to in_progress.</a:t>
+            </a:r>
+          </a:p>
+          <a:p xmlns:a="http://schemas.openxmlformats.org/drawingml/2006/main"/>
+          <a:p xmlns:a="http://schemas.openxmlformats.org/drawingml/2006/main">
+            <a:r>
+              <a:t>Watch the result. Zero, zero. Status remains in_progress. Compare that with the repeat on the last slide. There, the filter found the document and had nothing to change: one and zero. Here, no document satisfies the whole filter, so it never got that far: zero and zero. Read the box. The current document no longer satisfies status equals new.</a:t>
+            </a:r>
+          </a:p>
+          <a:p xmlns:a="http://schemas.openxmlformats.org/drawingml/2006/main"/>
+          <a:p xmlns:a="http://schemas.openxmlformats.org/drawingml/2006/main">
+            <a:r>
+              <a:t>Why would you want a write that can refuse itself? Picture two agents on the same ticket. One moves it to in_progress. The other, looking at an old screen, clicks resolve. Without the expected-state condition, the second click silently overwrites the first. With it, MongoDB rechecks the condition as part of the single-document write, and the stale action finds that its expectation no longer holds.</a:t>
+            </a:r>
+          </a:p>
+          <a:p xmlns:a="http://schemas.openxmlformats.org/drawingml/2006/main"/>
+          <a:p xmlns:a="http://schemas.openxmlformats.org/drawingml/2006/main">
+            <a:r>
+              <a:t>The application still needs a policy for that outcome. Reload the ticket, tell the user the state changed, or ask them to decide again. Do not treat every zero match as success. And read the last box: do not call it a broken connection either. A zero match is an application outcome to interpret.</a:t>
+            </a:r>
+          </a:p>
+          <a:p xmlns:a="http://schemas.openxmlformats.org/drawingml/2006/main"/>
+          <a:p xmlns:a="http://schemas.openxmlformats.org/drawingml/2006/main">
+            <a:r>
+              <a:t>This is a small state-transition example, not a full concurrency or retry protocol. The skill is to say what the filter permits and compare that with what is stored when the write runs.</a:t>
+            </a:r>
+          </a:p>
+          <a:p xmlns:a="http://schemas.openxmlformats.org/drawingml/2006/main"/>
           <a:p xmlns:a="http://schemas.openxmlformats.org/drawingml/2006/main">
             <a:r>
               <a:t>Sources:</a:t>
@@ -1180,54 +1090,34 @@
           <a:lstStyle xmlns:a="http://schemas.openxmlformats.org/drawingml/2006/main"/>
           <a:p xmlns:a="http://schemas.openxmlformats.org/drawingml/2006/main">
             <a:r>
-              <a:t>The push operator appends a value to an array. Our value is a small event document. If we sent an unconditional push twice, the array could contain two copies of that event. The fact that an event has an ID field does not automatically make the elements in an embedded array unique.</a:t>
-            </a:r>
-          </a:p>
-          <a:p xmlns:a="http://schemas.openxmlformats.org/drawingml/2006/main">
-            <a:r>
-              <a:t/>
-            </a:r>
-          </a:p>
-          <a:p xmlns:a="http://schemas.openxmlformats.org/drawingml/2006/main">
-            <a:r>
-              <a:t>This filter therefore also requires that events.event_id is not 5999. On the first execution, the array lacks that event ID, so one document matches and changes. After the append, repeating the same request finds no document satisfying the guard. The second result is zero and zero, and there is still just one event 5999.</a:t>
-            </a:r>
-          </a:p>
-          <a:p xmlns:a="http://schemas.openxmlformats.org/drawingml/2006/main">
-            <a:r>
-              <a:t/>
-            </a:r>
-          </a:p>
-          <a:p xmlns:a="http://schemas.openxmlformats.org/drawingml/2006/main">
-            <a:r>
-              <a:t>That behavior is useful, but keep its scope precise. It protects this single-document example from appending the same identified event again through this operation. Other writers need to follow compatible rules, and a complete distributed event system has additional failure and ordering concerns.</a:t>
-            </a:r>
-          </a:p>
-          <a:p xmlns:a="http://schemas.openxmlformats.org/drawingml/2006/main">
-            <a:r>
-              <a:t/>
-            </a:r>
-          </a:p>
-          <a:p xmlns:a="http://schemas.openxmlformats.org/drawingml/2006/main">
-            <a:r>
-              <a:t>Also notice that the earlier status update and this append are two different operations. Each individual operation is atomic for its document, but there is a gap between the two calls. A reader in that gap could see the new status without the new event.</a:t>
-            </a:r>
-          </a:p>
-          <a:p xmlns:a="http://schemas.openxmlformats.org/drawingml/2006/main">
-            <a:r>
-              <a:t/>
-            </a:r>
-          </a:p>
-          <a:p xmlns:a="http://schemas.openxmlformats.org/drawingml/2006/main">
-            <a:r>
-              <a:t>In the next meeting we will combine a status change and an embedded event append in one update. That connection between operations and document boundaries is one of the reasons modeling belongs in a database-administration course.</a:t>
-            </a:r>
-          </a:p>
-          <a:p xmlns:a="http://schemas.openxmlformats.org/drawingml/2006/main">
-            <a:r>
-              <a:t/>
-            </a:r>
-          </a:p>
+              <a:t>$push appends a value to an array. Here the value is a small event document, event 5999, a status change by an agent. If I send an unconditional push twice, the array gets two copies. Giving the event an ID field does not make embedded array elements unique.</a:t>
+            </a:r>
+          </a:p>
+          <a:p xmlns:a="http://schemas.openxmlformats.org/drawingml/2006/main"/>
+          <a:p xmlns:a="http://schemas.openxmlformats.org/drawingml/2006/main">
+            <a:r>
+              <a:t>So look at the filter. Besides our test markers, it says events.event_id is $ne 5999, not equal. Only match this ticket if it does not already contain event 5999. First run: the event is not there, so the result is one and one. Now watch the second run. The guard no longer matches, so the result is zero and zero, and there is still exactly one event 5999. That is the line in the box: the filter refuses a second append.</a:t>
+            </a:r>
+          </a:p>
+          <a:p xmlns:a="http://schemas.openxmlformats.org/drawingml/2006/main"/>
+          <a:p xmlns:a="http://schemas.openxmlformats.org/drawingml/2006/main">
+            <a:r>
+              <a:t>Keep the scope precise, though. This protects this one operation on this one document. Other code that writes events has to follow compatible rules, and a real distributed event system has more failure and ordering problems than this.</a:t>
+            </a:r>
+          </a:p>
+          <a:p xmlns:a="http://schemas.openxmlformats.org/drawingml/2006/main"/>
+          <a:p xmlns:a="http://schemas.openxmlformats.org/drawingml/2006/main">
+            <a:r>
+              <a:t>Now read the bottom box, because it sets up Day 2. The status update on slide 13 and this append were separate writes. Each one is atomic for its document. But there is a gap between the two calls, and a reader in that gap could see the new status without the event that explains it.</a:t>
+            </a:r>
+          </a:p>
+          <a:p xmlns:a="http://schemas.openxmlformats.org/drawingml/2006/main"/>
+          <a:p xmlns:a="http://schemas.openxmlformats.org/drawingml/2006/main">
+            <a:r>
+              <a:t>Next meeting, we put a status change and an event append into one update. That is where queries meet document design.</a:t>
+            </a:r>
+          </a:p>
+          <a:p xmlns:a="http://schemas.openxmlformats.org/drawingml/2006/main"/>
           <a:p xmlns:a="http://schemas.openxmlformats.org/drawingml/2006/main">
             <a:r>
               <a:t>Sources:</a:t>
@@ -1305,47 +1195,31 @@
           <a:lstStyle xmlns:a="http://schemas.openxmlformats.org/drawingml/2006/main"/>
           <a:p xmlns:a="http://schemas.openxmlformats.org/drawingml/2006/main">
             <a:r>
-              <a:t>The deletion uses the same exact test filter. First we read the target with a small projection, so the displayed identity is easy to inspect. Then delete_one removes one matching document. The result reports one deletion, and the follow-up find_one returns None because the test record is absent.</a:t>
-            </a:r>
-          </a:p>
-          <a:p xmlns:a="http://schemas.openxmlformats.org/drawingml/2006/main">
-            <a:r>
-              <a:t/>
-            </a:r>
-          </a:p>
-          <a:p xmlns:a="http://schemas.openxmlformats.org/drawingml/2006/main">
-            <a:r>
-              <a:t>We also count the other course fixture tickets. There should still be six. That comparison gives us a simple scope check in addition to checking that the unwanted test record disappeared. The six records are still available for query practice until the final cleanup cell removes this run's practice collection.</a:t>
-            </a:r>
-          </a:p>
-          <a:p xmlns:a="http://schemas.openxmlformats.org/drawingml/2006/main">
-            <a:r>
-              <a:t/>
-            </a:r>
-          </a:p>
-          <a:p xmlns:a="http://schemas.openxmlformats.org/drawingml/2006/main">
-            <a:r>
-              <a:t>Repeating the same delete reports zero. The filter is still narrow and valid, but its target has already gone. That is another example of an expected repeat result rather than a syntax failure.</a:t>
-            </a:r>
-          </a:p>
-          <a:p xmlns:a="http://schemas.openxmlformats.org/drawingml/2006/main">
-            <a:r>
-              <a:t/>
-            </a:r>
-          </a:p>
-          <a:p xmlns:a="http://schemas.openxmlformats.org/drawingml/2006/main">
-            <a:r>
-              <a:t>Avoid an empty filter when the requirement is to delete one particular ticket. An empty dictionary matches every document. Delete_one with an empty filter can remove some matching record without establishing that it is the intended one. Delete_many with an empty filter removes all matching records.</a:t>
-            </a:r>
-          </a:p>
-          <a:p xmlns:a="http://schemas.openxmlformats.org/drawingml/2006/main">
-            <a:r>
-              <a:t/>
-            </a:r>
-          </a:p>
-          <a:p xmlns:a="http://schemas.openxmlformats.org/drawingml/2006/main">
-            <a:r>
-              <a:t>Finally, a preview query is not a lock. Another writer can act between the preview and deletion. In this private exercise we control the fixture. In a shared application, expected-state conditions and suitable transaction or concurrency rules may be necessary. Previewing is a useful habit, but it does not itself create a transactional guarantee.</a:t>
+              <a:t>Deleting is where predicate discipline matters most, because there is no undo cell.</a:t>
+            </a:r>
+          </a:p>
+          <a:p xmlns:a="http://schemas.openxmlformats.org/drawingml/2006/main"/>
+          <a:p xmlns:a="http://schemas.openxmlformats.org/drawingml/2006/main">
+            <a:r>
+              <a:t>Look at the first line. Before deleting, we read the target with find_one and a small projection, so we can see exactly which document the filter identifies. Then delete_one with the same exact test filter. Watch the output. Deleted: 1. Remaining test record: None, because find_one returns None when nothing matches. Other tickets: 6. That last count is our scope check. We confirmed the target is gone and the six teaching tickets are untouched. They stay available for practice until the cleanup cell removes this run's practice collection.</a:t>
+            </a:r>
+          </a:p>
+          <a:p xmlns:a="http://schemas.openxmlformats.org/drawingml/2006/main"/>
+          <a:p xmlns:a="http://schemas.openxmlformats.org/drawingml/2006/main">
+            <a:r>
+              <a:t>Now run the same delete again. It reports zero. The filter is still valid and still narrow. Its target is simply gone already. That is an expected repeat result, not a syntax failure.</a:t>
+            </a:r>
+          </a:p>
+          <a:p xmlns:a="http://schemas.openxmlformats.org/drawingml/2006/main"/>
+          <a:p xmlns:a="http://schemas.openxmlformats.org/drawingml/2006/main">
+            <a:r>
+              <a:t>Read the caution box. An empty filter, a pair of empty braces, matches every document. delete_one with an empty filter removes some document, with no guarantee it is the one you meant. delete_many with an empty filter removes all of them. If the requirement is one specific ticket, the filter must say so.</a:t>
+            </a:r>
+          </a:p>
+          <a:p xmlns:a="http://schemas.openxmlformats.org/drawingml/2006/main"/>
+          <a:p xmlns:a="http://schemas.openxmlformats.org/drawingml/2006/main">
+            <a:r>
+              <a:t>The second half of the caution: a preview is not a lock. Between your find_one and your delete, another writer can change things. In this private exercise, we control the data. In a shared application, you need expected-state conditions or suitable transaction and concurrency rules. Previewing is a good habit, but it does not give you a transactional guarantee.</a:t>
             </a:r>
           </a:p>
         </p:txBody>
@@ -1415,67 +1289,31 @@
           <a:lstStyle xmlns:a="http://schemas.openxmlformats.org/drawingml/2006/main"/>
           <a:p xmlns:a="http://schemas.openxmlformats.org/drawingml/2006/main">
             <a:r>
-              <a:t>The first lab stays in one notebook. We have used SQL and MongoDB to ask the same question about the same six tickets. Both results identified ticket 1001 as active and high priority. The syntax changed, but we still had to decide which records belong in the answer and which fields to show.</a:t>
-            </a:r>
-          </a:p>
-          <a:p xmlns:a="http://schemas.openxmlformats.org/drawingml/2006/main">
-            <a:r>
-              <a:t/>
-            </a:r>
-          </a:p>
-          <a:p xmlns:a="http://schemas.openxmlformats.org/drawingml/2006/main">
-            <a:r>
-              <a:t>Your question is now different. The lighting and sanitation crews want their active requests, newest first, with priority displayed. A medium-priority request still needs work. Keep the category condition in the starter, add the active-status condition, and add priority to the projection. Carrying over the demonstration's high-or-urgent condition would incorrectly hide some work.</a:t>
-            </a:r>
-          </a:p>
-          <a:p xmlns:a="http://schemas.openxmlformats.org/drawingml/2006/main">
-            <a:r>
-              <a:t/>
-            </a:r>
-          </a:p>
-          <a:p xmlns:a="http://schemas.openxmlformats.org/drawingml/2006/main">
-            <a:r>
-              <a:t>Predict the order from the actual opening dates before running the query. The completed queue has tickets 1006, 1002, and 1001, in that order. Ticket 1005 belongs to sanitation and has high priority, but it is resolved. Including it would mix completed work with the crew's current queue. This is why a query can be syntactically correct yet answer a different operational question.</a:t>
-            </a:r>
-          </a:p>
-          <a:p xmlns:a="http://schemas.openxmlformats.org/drawingml/2006/main">
-            <a:r>
-              <a:t/>
-            </a:r>
-          </a:p>
-          <a:p xmlns:a="http://schemas.openxmlformats.org/drawingml/2006/main">
-            <a:r>
-              <a:t>Next, compare the array predicates using the actual event objects. The useful part is the difference between a resident-created event and a separate agent event in one ticket. Your explanation should connect the data to the observed query results.</a:t>
-            </a:r>
-          </a:p>
-          <a:p xmlns:a="http://schemas.openxmlformats.org/drawingml/2006/main">
-            <a:r>
-              <a:t/>
-            </a:r>
-          </a:p>
-          <a:p xmlns:a="http://schemas.openxmlformats.org/drawingml/2006/main">
-            <a:r>
-              <a:t>For the write experiment, run the set cell twice without rerunning test insertion. Observe one match and one modification, then one match with no modification. Compare those with the expected-state update, which does not match the already changed ticket. Run the targeted deletion and inspect the remaining data.</a:t>
-            </a:r>
-          </a:p>
-          <a:p xmlns:a="http://schemas.openxmlformats.org/drawingml/2006/main">
-            <a:r>
-              <a:t/>
-            </a:r>
-          </a:p>
-          <a:p xmlns:a="http://schemas.openxmlformats.org/drawingml/2006/main">
-            <a:r>
-              <a:t>Complete the notebook's short explanation cell rather than creating a separate report. Include whether you used the local path or Atlas so your account of the experiment is accurate. Both paths support the required query lesson, but only the Atlas path tests your hosted connection.</a:t>
-            </a:r>
-          </a:p>
-          <a:p xmlns:a="http://schemas.openxmlformats.org/drawingml/2006/main">
-            <a:r>
-              <a:t/>
-            </a:r>
-          </a:p>
-          <a:p xmlns:a="http://schemas.openxmlformats.org/drawingml/2006/main">
-            <a:r>
-              <a:t>Before finishing, run cleanup and remove any accidentally saved credential. If you used Atlas, also remove the temporary network entry and any class-only database user when no longer needed. You submit the completed notebook. There is no additional screenshot or repository task for this lab.</a:t>
+              <a:t>Here is Lab 1. In the weekly guide it is called Find and Change the Right Document, and it all happens in one notebook. You already saw SQL and MongoDB both find ticket 1001 for the same question.</a:t>
+            </a:r>
+          </a:p>
+          <a:p xmlns:a="http://schemas.openxmlformats.org/drawingml/2006/main"/>
+          <a:p xmlns:a="http://schemas.openxmlformats.org/drawingml/2006/main">
+            <a:r>
+              <a:t>Now the question changes. The lighting and sanitation crews want their active tickets, newest first, with priority displayed. Keep the category condition in the starter, add the active-status condition, and add priority to the projection. Do not carry over the demo's high-or-urgent condition. Medium-priority work still needs a crew, and that condition would hide it.</a:t>
+            </a:r>
+          </a:p>
+          <a:p xmlns:a="http://schemas.openxmlformats.org/drawingml/2006/main"/>
+          <a:p xmlns:a="http://schemas.openxmlformats.org/drawingml/2006/main">
+            <a:r>
+              <a:t>Predict the order from the opening dates before you run anything. The finished queue is 1006, 1002, and 1001, in that order. Then explain ticket 1005. It is sanitation and high priority, but it is resolved, so including it would mix finished work into the crew's queue.</a:t>
+            </a:r>
+          </a:p>
+          <a:p xmlns:a="http://schemas.openxmlformats.org/drawingml/2006/main"/>
+          <a:p xmlns:a="http://schemas.openxmlformats.org/drawingml/2006/main">
+            <a:r>
+              <a:t>Next, compare the two array queries using the actual event objects. Then run the $set cell twice without rerunning the test insert: one and one, then one and zero. Compare that with the expected-state update. Read the changed test ticket, then run the targeted delete.</a:t>
+            </a:r>
+          </a:p>
+          <a:p xmlns:a="http://schemas.openxmlformats.org/drawingml/2006/main"/>
+          <a:p xmlns:a="http://schemas.openxmlformats.org/drawingml/2006/main">
+            <a:r>
+              <a:t>At the end of the notebook is a section called Results Record with the questions. Add a text cell under it, write your answers there, and say whether you used local mode or Atlas. Run cleanup, remove any saved credential, and if you used Atlas, remove the temporary IP rule. Submit the notebook. No screenshot.</a:t>
             </a:r>
           </a:p>
         </p:txBody>
@@ -1545,37 +1383,31 @@
           <a:lstStyle xmlns:a="http://schemas.openxmlformats.org/drawingml/2006/main"/>
           <a:p xmlns:a="http://schemas.openxmlformats.org/drawingml/2006/main">
             <a:r>
-              <a:t>We now have a way to ask documents questions and observe their changes. Today we use that understanding to design the ticket page. The page needs the ticket's current status and recent events. The system also needs to keep the full history, including events the page does not currently display.</a:t>
-            </a:r>
-          </a:p>
-          <a:p xmlns:a="http://schemas.openxmlformats.org/drawingml/2006/main">
-            <a:r>
-              <a:t/>
-            </a:r>
-          </a:p>
-          <a:p xmlns:a="http://schemas.openxmlformats.org/drawingml/2006/main">
-            <a:r>
-              <a:t>A resident's contact information has a different pattern of change. The resident might correct an email address once and expect future ticket pages to use the corrected value. If we copied the current email into every ticket, the update requirement would cross many documents.</a:t>
-            </a:r>
-          </a:p>
-          <a:p xmlns:a="http://schemas.openxmlformats.org/drawingml/2006/main">
-            <a:r>
-              <a:t/>
-            </a:r>
-          </a:p>
-          <a:p xmlns:a="http://schemas.openxmlformats.org/drawingml/2006/main">
-            <a:r>
-              <a:t>Those requirements do not point to a single universal document shape. They tell us which costs we should compare. Putting related data together can make a read convenient and can bring related changes into one atomic document write. Keeping a shared identity or growing history separate can make independent changes and retention easier.</a:t>
-            </a:r>
-          </a:p>
-          <a:p xmlns:a="http://schemas.openxmlformats.org/drawingml/2006/main">
-            <a:r>
-              <a:t/>
-            </a:r>
-          </a:p>
-          <a:p xmlns:a="http://schemas.openxmlformats.org/drawingml/2006/main">
-            <a:r>
-              <a:t>The live example will use one-to-one relationships. Your individual practice will use one-to-many relationships and then revise one ticket design for the latest-events requirement. We will not repeat the complete JSON exercise from last week or ask you to build a full web application. The new work is explaining how the chosen shape serves concrete reads and updates.</a:t>
+              <a:t>Welcome back. Last time we queried documents and watched what our writes actually did. Today we design the ticket page.</a:t>
+            </a:r>
+          </a:p>
+          <a:p xmlns:a="http://schemas.openxmlformats.org/drawingml/2006/main"/>
+          <a:p xmlns:a="http://schemas.openxmlformats.org/drawingml/2006/main">
+            <a:r>
+              <a:t>Look at the first box. The page needs the ticket's current status and only its latest events. Now read the second box. Contact details change independently, and the system still has to keep years of event history, including everything the page does not show.</a:t>
+            </a:r>
+          </a:p>
+          <a:p xmlns:a="http://schemas.openxmlformats.org/drawingml/2006/main"/>
+          <a:p xmlns:a="http://schemas.openxmlformats.org/drawingml/2006/main">
+            <a:r>
+              <a:t>Think about what that means. A resident fixes their email address once, and they expect every ticket page from then on to show the corrected value. If we had copied the email into every ticket they ever opened, that one correction becomes an update across many documents, and missing one leaves a wrong address on a page.</a:t>
+            </a:r>
+          </a:p>
+          <a:p xmlns:a="http://schemas.openxmlformats.org/drawingml/2006/main"/>
+          <a:p xmlns:a="http://schemas.openxmlformats.org/drawingml/2006/main">
+            <a:r>
+              <a:t>Read the last line: those requirements influence the document boundary. Notice it does not say they choose it. There is no single correct document shape. The requirements tell us which costs to compare. Keeping related data together makes a read convenient and lets related changes happen in one atomic document write. Keeping a shared identity, or a growing history, separate makes independent changes and long retention easier.</a:t>
+            </a:r>
+          </a:p>
+          <a:p xmlns:a="http://schemas.openxmlformats.org/drawingml/2006/main"/>
+          <a:p xmlns:a="http://schemas.openxmlformats.org/drawingml/2006/main">
+            <a:r>
+              <a:t>Here is the plan. My live example uses a one-to-one relationship. Your individual practice uses one-to-many, and then you revise one ticket design for the latest-events requirement. We are not redoing last week's JSON exercise, and nobody is building a web application. The new skill is explaining how a shape serves real reads and updates.</a:t>
             </a:r>
           </a:p>
         </p:txBody>
@@ -1645,47 +1477,31 @@
           <a:lstStyle xmlns:a="http://schemas.openxmlformats.org/drawingml/2006/main"/>
           <a:p xmlns:a="http://schemas.openxmlformats.org/drawingml/2006/main">
             <a:r>
-              <a:t>Cardinality describes how many entities can participate on each side of a relationship under the application's rules. Many tickets may refer to one requester. One ticket may have many events. In the small publisher example, we will assume that a publisher has one headquarters and that the headquarters belongs to that publisher.</a:t>
-            </a:r>
-          </a:p>
-          <a:p xmlns:a="http://schemas.openxmlformats.org/drawingml/2006/main">
-            <a:r>
-              <a:t/>
-            </a:r>
-          </a:p>
-          <a:p xmlns:a="http://schemas.openxmlformats.org/drawingml/2006/main">
-            <a:r>
-              <a:t>These statements describe relationships, not storage decisions. A one-to-one relationship can appear as fields inside one document, a nested subdocument, or separate referenced documents. A one-to-many relationship might involve a small fixed set or years of accumulating records. The word many does not tell us which of those situations applies.</a:t>
-            </a:r>
-          </a:p>
-          <a:p xmlns:a="http://schemas.openxmlformats.org/drawingml/2006/main">
-            <a:r>
-              <a:t/>
-            </a:r>
-          </a:p>
-          <a:p xmlns:a="http://schemas.openxmlformats.org/drawingml/2006/main">
-            <a:r>
-              <a:t>For a requester, the independent user identity and contact changes matter. For ticket events, the growth and the need to query history independently matter. For one owned headquarters address, a bounded nested object can be convenient when the publisher details are normally read together.</a:t>
-            </a:r>
-          </a:p>
-          <a:p xmlns:a="http://schemas.openxmlformats.org/drawingml/2006/main">
-            <a:r>
-              <a:t/>
-            </a:r>
-          </a:p>
-          <a:p xmlns:a="http://schemas.openxmlformats.org/drawingml/2006/main">
-            <a:r>
-              <a:t>We should also make assumptions explicit. A company could have more than one location. If we call the relationship one-to-one, we must be clear that the field means the one designated headquarters in this example, not every office the company operates.</a:t>
-            </a:r>
-          </a:p>
-          <a:p xmlns:a="http://schemas.openxmlformats.org/drawingml/2006/main">
-            <a:r>
-              <a:t/>
-            </a:r>
-          </a:p>
-          <a:p xmlns:a="http://schemas.openxmlformats.org/drawingml/2006/main">
-            <a:r>
-              <a:t>This is familiar relational reasoning carried into document design. We still ask what each entity means and how the relationships work. We then choose the document boundary using the reads, writes, ownership, and expected growth rather than cardinality alone.</a:t>
+              <a:t>Here is a word you know from relational design: cardinality. It describes how many things can sit on each side of a relationship under the application's rules. Look at the table. Many tickets point to one requester. One ticket has many events. And in our small publisher example, we assume one publisher has one headquarters.</a:t>
+            </a:r>
+          </a:p>
+          <a:p xmlns:a="http://schemas.openxmlformats.org/drawingml/2006/main"/>
+          <a:p xmlns:a="http://schemas.openxmlformats.org/drawingml/2006/main">
+            <a:r>
+              <a:t>Now look at the third column, because that is where decisions come from. Ticket to requester: the shared user can change independently. Ticket to events: history can outgrow an embedded array. Publisher to headquarters: a small owned address can fit inside its publisher.</a:t>
+            </a:r>
+          </a:p>
+          <a:p xmlns:a="http://schemas.openxmlformats.org/drawingml/2006/main"/>
+          <a:p xmlns:a="http://schemas.openxmlformats.org/drawingml/2006/main">
+            <a:r>
+              <a:t>Notice what cardinality did not do. It did not choose the storage. Read the box. A one-to-one relationship could be fields in one document, a nested subdocument, or two referenced documents. And the word many is vague. Many could mean three fixed items or years of accumulating records, and those need very different designs.</a:t>
+            </a:r>
+          </a:p>
+          <a:p xmlns:a="http://schemas.openxmlformats.org/drawingml/2006/main"/>
+          <a:p xmlns:a="http://schemas.openxmlformats.org/drawingml/2006/main">
+            <a:r>
+              <a:t>So what does decide it? The second line of the box: ownership, reads, writes, and growth. For the requester, it is the independent identity and contact changes. For events, it is growth and the need to query history on its own. For the headquarters, it is a small object that is normally read together with the publisher.</a:t>
+            </a:r>
+          </a:p>
+          <a:p xmlns:a="http://schemas.openxmlformats.org/drawingml/2006/main"/>
+          <a:p xmlns:a="http://schemas.openxmlformats.org/drawingml/2006/main">
+            <a:r>
+              <a:t>And say your assumptions out loud. Real companies can have several offices. If we call this one-to-one, we mean the one designated headquarters, not every office. That is the relational reasoning you already know, carried into document design.</a:t>
             </a:r>
           </a:p>
         </p:txBody>
@@ -1755,54 +1571,28 @@
           <a:lstStyle xmlns:a="http://schemas.openxmlformats.org/drawingml/2006/main"/>
           <a:p xmlns:a="http://schemas.openxmlformats.org/drawingml/2006/main">
             <a:r>
-              <a:t>We already have a vocabulary for describing a database query. We choose a source, select the records we need, choose the fields to return, and sometimes order or limit the result. Those ideas are useful in MongoDB, even though the syntax and some semantics differ.</a:t>
-            </a:r>
-          </a:p>
-          <a:p xmlns:a="http://schemas.openxmlformats.org/drawingml/2006/main">
-            <a:r>
-              <a:t/>
-            </a:r>
-          </a:p>
-          <a:p xmlns:a="http://schemas.openxmlformats.org/drawingml/2006/main">
-            <a:r>
-              <a:t>In the Python notebook, database followed by tickets in square brackets gives us a handle for the tickets collection. That handle is a Python object through which we send operations. A filter such as status equal to open is a dictionary. It is not a string containing a SQL WHERE clause. We pass the dictionary to the find method.</a:t>
-            </a:r>
-          </a:p>
-          <a:p xmlns:a="http://schemas.openxmlformats.org/drawingml/2006/main">
-            <a:r>
-              <a:t/>
-            </a:r>
-          </a:p>
-          <a:p xmlns:a="http://schemas.openxmlformats.org/drawingml/2006/main">
-            <a:r>
-              <a:t>The projection is another dictionary. A one beside ticket_id asks for that field in the result. An explicit zero beside underscore id hides MongoDB's document identifier, which an inclusion projection otherwise returns by default. The ticket number and MongoDB's underscore id are separate identifiers in our fixture.</a:t>
-            </a:r>
-          </a:p>
-          <a:p xmlns:a="http://schemas.openxmlformats.org/drawingml/2006/main">
-            <a:r>
-              <a:t/>
-            </a:r>
-          </a:p>
-          <a:p xmlns:a="http://schemas.openxmlformats.org/drawingml/2006/main">
-            <a:r>
-              <a:t>Sorting by ticket_id with one means ascending order. The limit selects how many matching results to return. We will put those pieces into complete Python expressions rather than trying to memorize this table alone.</a:t>
-            </a:r>
-          </a:p>
-          <a:p xmlns:a="http://schemas.openxmlformats.org/drawingml/2006/main">
-            <a:r>
-              <a:t/>
-            </a:r>
-          </a:p>
-          <a:p xmlns:a="http://schemas.openxmlformats.org/drawingml/2006/main">
-            <a:r>
-              <a:t>The comparison has boundaries. Arrays are values within documents, and missing fields do not behave exactly like SQL nulls. A familiar concept is a starting point for reasoning, not a guarantee that punctuation is the only difference.</a:t>
-            </a:r>
-          </a:p>
-          <a:p xmlns:a="http://schemas.openxmlformats.org/drawingml/2006/main">
-            <a:r>
-              <a:t/>
-            </a:r>
-          </a:p>
+              <a:t>Here is the good news: you already know how to describe a query. Pick a source, pick the records, pick the fields, and maybe order and limit the result. Look at the table. The left column is the purpose, the middle is the SQL you know, and the right is the same idea in Python with PyMongo.</a:t>
+            </a:r>
+          </a:p>
+          <a:p xmlns:a="http://schemas.openxmlformats.org/drawingml/2006/main"/>
+          <a:p xmlns:a="http://schemas.openxmlformats.org/drawingml/2006/main">
+            <a:r>
+              <a:t>Choose a source. In SQL, FROM tickets. In our notebook, database, square bracket, tickets. That gives us a handle on the tickets collection, a Python object we send operations through. Choose records. Instead of WHERE status equals open, we write a dictionary: status, colon, open. Read the bottom line of the slide. A filter is a dictionary, not a SQL string. We hand that dictionary to find.</a:t>
+            </a:r>
+          </a:p>
+          <a:p xmlns:a="http://schemas.openxmlformats.org/drawingml/2006/main"/>
+          <a:p xmlns:a="http://schemas.openxmlformats.org/drawingml/2006/main">
+            <a:r>
+              <a:t>Choose output fields. The projection is another dictionary. A one beside ticket_id asks for that field. The zero beside underscore id hides MongoDB's own document identifier, which would otherwise come back by default. In our fixture, ticket_id and underscore id are two different identifiers. Order and restrict: sort on ticket_id with a one means ascending, and limit two returns two results.</a:t>
+            </a:r>
+          </a:p>
+          <a:p xmlns:a="http://schemas.openxmlformats.org/drawingml/2006/main"/>
+          <a:p xmlns:a="http://schemas.openxmlformats.org/drawingml/2006/main">
+            <a:r>
+              <a:t>Now the caution in the box. The concepts transfer, but some rules do not. Arrays are values inside documents, and a missing field does not behave exactly like a SQL null. So treat what you know from SQL as a starting point for reasoning, not a promise that only the punctuation changed.</a:t>
+            </a:r>
+          </a:p>
+          <a:p xmlns:a="http://schemas.openxmlformats.org/drawingml/2006/main"/>
           <a:p xmlns:a="http://schemas.openxmlformats.org/drawingml/2006/main">
             <a:r>
               <a:t>Sources:</a:t>
@@ -1880,54 +1670,34 @@
           <a:lstStyle xmlns:a="http://schemas.openxmlformats.org/drawingml/2006/main"/>
           <a:p xmlns:a="http://schemas.openxmlformats.org/drawingml/2006/main">
             <a:r>
-              <a:t>The live MongoDB University resource is Lesson 3, Modeling One-to-One, in Modeling Data Relationships. We will use that lesson's one-to-one material and its practice as the instructor example. Your assigned interactive activity is Lesson 4, so you will apply the reasoning to a different relationship.</a:t>
-            </a:r>
-          </a:p>
-          <a:p xmlns:a="http://schemas.openxmlformats.org/drawingml/2006/main">
-            <a:r>
-              <a:t/>
-            </a:r>
-          </a:p>
-          <a:p xmlns:a="http://schemas.openxmlformats.org/drawingml/2006/main">
-            <a:r>
-              <a:t>This small publisher document illustrates a possible shape. The headquarters address lives as an object inside the publisher. If the application normally loads that address with the publisher, and the address belongs only to this publisher under our stated assumptions, the embedding can keep the relevant facts together.</a:t>
-            </a:r>
-          </a:p>
-          <a:p xmlns:a="http://schemas.openxmlformats.org/drawingml/2006/main">
-            <a:r>
-              <a:t/>
-            </a:r>
-          </a:p>
-          <a:p xmlns:a="http://schemas.openxmlformats.org/drawingml/2006/main">
-            <a:r>
-              <a:t>Another design could store the address separately and put an address identifier in the publisher document. That could be reasonable if the address had an independent lifecycle, permissions, or queries that justified the separation. Merely having a one-to-one relationship does not forbid either representation.</a:t>
-            </a:r>
-          </a:p>
-          <a:p xmlns:a="http://schemas.openxmlformats.org/drawingml/2006/main">
-            <a:r>
-              <a:t/>
-            </a:r>
-          </a:p>
-          <a:p xmlns:a="http://schemas.openxmlformats.org/drawingml/2006/main">
-            <a:r>
-              <a:t>The example text here is our own small illustration, not the supplied answer to a vendor practice question. As we work through the live resource, we will connect its example to these ownership and access considerations.</a:t>
-            </a:r>
-          </a:p>
-          <a:p xmlns:a="http://schemas.openxmlformats.org/drawingml/2006/main">
-            <a:r>
-              <a:t/>
-            </a:r>
-          </a:p>
-          <a:p xmlns:a="http://schemas.openxmlformats.org/drawingml/2006/main">
-            <a:r>
-              <a:t>The unit names matter. MongoDB University sometimes reuses a video in a newer course package. Choosing two differently named courses does not automatically give us two different activities. Our boundary today is explicit: one-to-one practice in the demonstration, one-to-many practice for your individual work.</a:t>
-            </a:r>
-          </a:p>
-          <a:p xmlns:a="http://schemas.openxmlformats.org/drawingml/2006/main">
-            <a:r>
-              <a:t/>
-            </a:r>
-          </a:p>
+              <a:t>The live resource for my demonstration is MongoDB University, Modeling Data Relationships, Lesson 3: Modeling One-to-One. I will work through its one-to-one material and its practice. Your assigned activity is Lesson 4, so you will apply the same reasoning to a different relationship.</a:t>
+            </a:r>
+          </a:p>
+          <a:p xmlns:a="http://schemas.openxmlformats.org/drawingml/2006/main"/>
+          <a:p xmlns:a="http://schemas.openxmlformats.org/drawingml/2006/main">
+            <a:r>
+              <a:t>Look at the small JSON document. A publisher, p7, named Example Press, with a headquarters object inside it: city New York, country US. The address is embedded in the publisher. When is that a good idea? If the application normally loads the address together with the publisher, and the address belongs only to this publisher under our stated assumption, keeping them in one document puts the related facts together and returns them in one read.</a:t>
+            </a:r>
+          </a:p>
+          <a:p xmlns:a="http://schemas.openxmlformats.org/drawingml/2006/main"/>
+          <a:p xmlns:a="http://schemas.openxmlformats.org/drawingml/2006/main">
+            <a:r>
+              <a:t>Another design could store the address as its own document and put an address identifier in the publisher. That could be right too, if the address had its own lifecycle, its own permissions, or its own queries. Being one-to-one does not forbid either shape.</a:t>
+            </a:r>
+          </a:p>
+          <a:p xmlns:a="http://schemas.openxmlformats.org/drawingml/2006/main"/>
+          <a:p xmlns:a="http://schemas.openxmlformats.org/drawingml/2006/main">
+            <a:r>
+              <a:t>To be clear, this document is our own small illustration, not the answer to the vendor's practice question. As we go through the lesson, I will connect its example to ownership and access.</a:t>
+            </a:r>
+          </a:p>
+          <a:p xmlns:a="http://schemas.openxmlformats.org/drawingml/2006/main"/>
+          <a:p xmlns:a="http://schemas.openxmlformats.org/drawingml/2006/main">
+            <a:r>
+              <a:t>Read the last line of the slide. The unit names matter. MongoDB University sometimes reuses the same video in a newer course package, so two differently named courses do not automatically mean two different activities. Our boundary today is explicit: one-to-one in my demonstration, one-to-many in your individual work.</a:t>
+            </a:r>
+          </a:p>
+          <a:p xmlns:a="http://schemas.openxmlformats.org/drawingml/2006/main"/>
           <a:p xmlns:a="http://schemas.openxmlformats.org/drawingml/2006/main">
             <a:r>
               <a:t>Sources:</a:t>
@@ -2010,54 +1780,40 @@
           <a:lstStyle xmlns:a="http://schemas.openxmlformats.org/drawingml/2006/main"/>
           <a:p xmlns:a="http://schemas.openxmlformats.org/drawingml/2006/main">
             <a:r>
-              <a:t>This fresh demonstration collection contains ticket 1001 in status open. The update document has both a set operator and a push operator. Set changes the current status to in_progress. Push appends the status-change event to the embedded events array.</a:t>
-            </a:r>
-          </a:p>
-          <a:p xmlns:a="http://schemas.openxmlformats.org/drawingml/2006/main">
-            <a:r>
-              <a:t/>
-            </a:r>
-          </a:p>
-          <a:p xmlns:a="http://schemas.openxmlformats.org/drawingml/2006/main">
-            <a:r>
-              <a:t>Because both changes are part of one write to one document, they form an atomic document update. A reader does not observe only half of this particular write. That is different from Day 1's two separate calls, where the status changed before the append ran.</a:t>
-            </a:r>
-          </a:p>
-          <a:p xmlns:a="http://schemas.openxmlformats.org/drawingml/2006/main">
-            <a:r>
-              <a:t/>
-            </a:r>
-          </a:p>
-          <a:p xmlns:a="http://schemas.openxmlformats.org/drawingml/2006/main">
-            <a:r>
-              <a:t>The filter includes the expected current state open. On the first execution, the demonstration document matches and changes. Repeating the update no longer matches because its state is in_progress. The repeat does not append a second copy of the event. This follows from the specific state condition and operation, not from a universal rule that push prevents duplicates.</a:t>
-            </a:r>
-          </a:p>
-          <a:p xmlns:a="http://schemas.openxmlformats.org/drawingml/2006/main">
-            <a:r>
-              <a:t/>
-            </a:r>
-          </a:p>
-          <a:p xmlns:a="http://schemas.openxmlformats.org/drawingml/2006/main">
-            <a:r>
-              <a:t>If the event lived in another document, changing the ticket and inserting that event would cross a document boundary. We would need to decide how to coordinate them. MongoDB supports multi-document transactions, but using them has costs and requires an appropriate deployment and application design. We are not implementing that full mechanism in this beginner example.</a:t>
-            </a:r>
-          </a:p>
-          <a:p xmlns:a="http://schemas.openxmlformats.org/drawingml/2006/main">
-            <a:r>
-              <a:t/>
-            </a:r>
-          </a:p>
-          <a:p xmlns:a="http://schemas.openxmlformats.org/drawingml/2006/main">
-            <a:r>
-              <a:t>Single-document atomicity is one modeling consideration. It does not justify growing one document without limit or copying every shared fact into it. We need to consider those requirements together.</a:t>
-            </a:r>
-          </a:p>
-          <a:p xmlns:a="http://schemas.openxmlformats.org/drawingml/2006/main">
-            <a:r>
-              <a:t/>
-            </a:r>
-          </a:p>
+              <a:t>Remember Day 1's gap, where the status change and the event append were two separate writes? Here is how to close it.</a:t>
+            </a:r>
+          </a:p>
+          <a:p xmlns:a="http://schemas.openxmlformats.org/drawingml/2006/main"/>
+          <a:p xmlns:a="http://schemas.openxmlformats.org/drawingml/2006/main">
+            <a:r>
+              <a:t>This runs on a fresh demonstration collection, where ticket 1001 is open. Look at the update document. It has two operators. $set changes the status to in_progress. $push appends event 5099, a status_changed event, to the embedded events array. Both in one call.</a:t>
+            </a:r>
+          </a:p>
+          <a:p xmlns:a="http://schemas.openxmlformats.org/drawingml/2006/main"/>
+          <a:p xmlns:a="http://schemas.openxmlformats.org/drawingml/2006/main">
+            <a:r>
+              <a:t>Because both changes are one write to one document, they are atomic together. That is the first line of the box. A reader never sees the new status without the event. On Day 1, by contrast, the status changed before the append ran.</a:t>
+            </a:r>
+          </a:p>
+          <a:p xmlns:a="http://schemas.openxmlformats.org/drawingml/2006/main"/>
+          <a:p xmlns:a="http://schemas.openxmlformats.org/drawingml/2006/main">
+            <a:r>
+              <a:t>Now look at the filter. It includes the expected state: status open. On the first run, the document matches and changes. Now watch me repeat it. The ticket is in_progress now, so the filter finds no open ticket 1001. Zero, zero, and no second event. That comes from the state condition, not from some rule that $push prevents duplicates. It does not.</a:t>
+            </a:r>
+          </a:p>
+          <a:p xmlns:a="http://schemas.openxmlformats.org/drawingml/2006/main"/>
+          <a:p xmlns:a="http://schemas.openxmlformats.org/drawingml/2006/main">
+            <a:r>
+              <a:t>Read the scope note. If the event lived in a separate document, changing the ticket and inserting the event would cross a document boundary, and we would have to coordinate them. MongoDB does support multi-document transactions, but they have costs and need the right deployment and application design.</a:t>
+            </a:r>
+          </a:p>
+          <a:p xmlns:a="http://schemas.openxmlformats.org/drawingml/2006/main"/>
+          <a:p xmlns:a="http://schemas.openxmlformats.org/drawingml/2006/main">
+            <a:r>
+              <a:t>So single-document atomicity is a real reason to embed. It is not a reason to grow one document forever or to copy every shared fact into it.</a:t>
+            </a:r>
+          </a:p>
+          <a:p xmlns:a="http://schemas.openxmlformats.org/drawingml/2006/main"/>
           <a:p xmlns:a="http://schemas.openxmlformats.org/drawingml/2006/main">
             <a:r>
               <a:t>Sources:</a:t>
@@ -2135,47 +1891,31 @@
           <a:lstStyle xmlns:a="http://schemas.openxmlformats.org/drawingml/2006/main"/>
           <a:p xmlns:a="http://schemas.openxmlformats.org/drawingml/2006/main">
             <a:r>
-              <a:t>Consider a resident who changes their email address. The ticket's requester ID should not change, because the person's identity has not changed. The current email belongs in an authoritative user record if the requirement is to correct it in one place.</a:t>
-            </a:r>
-          </a:p>
-          <a:p xmlns:a="http://schemas.openxmlformats.org/drawingml/2006/main">
-            <a:r>
-              <a:t/>
-            </a:r>
-          </a:p>
-          <a:p xmlns:a="http://schemas.openxmlformats.org/drawingml/2006/main">
-            <a:r>
-              <a:t>The page can read the ticket, obtain the requester ID, and read that user's current contact information. This requires another retrieval, but it avoids maintaining many copies of a fact that the application promises is current.</a:t>
-            </a:r>
-          </a:p>
-          <a:p xmlns:a="http://schemas.openxmlformats.org/drawingml/2006/main">
-            <a:r>
-              <a:t/>
-            </a:r>
-          </a:p>
-          <a:p xmlns:a="http://schemas.openxmlformats.org/drawingml/2006/main">
-            <a:r>
-              <a:t>A historical name has a different meaning. Suppose a business needs to retain the name shown when a request opened. A field named requester_name_at_open can deliberately record that snapshot. Keeping its original value after the person changes their current display name may be correct. We should not call that historical field stale simply because it differs from the current profile.</a:t>
-            </a:r>
-          </a:p>
-          <a:p xmlns:a="http://schemas.openxmlformats.org/drawingml/2006/main">
-            <a:r>
-              <a:t/>
-            </a:r>
-          </a:p>
-          <a:p xmlns:a="http://schemas.openxmlformats.org/drawingml/2006/main">
-            <a:r>
-              <a:t>The error is to mix the meanings without stating them. A field that the application presents as the current email should follow the current-contact rule. A historical snapshot should be named and explained as historical. The database cannot infer which interpretation the designer intended from a vaguely named string alone.</a:t>
-            </a:r>
-          </a:p>
-          <a:p xmlns:a="http://schemas.openxmlformats.org/drawingml/2006/main">
-            <a:r>
-              <a:t/>
-            </a:r>
-          </a:p>
-          <a:p xmlns:a="http://schemas.openxmlformats.org/drawingml/2006/main">
-            <a:r>
-              <a:t>A reference also does not create an automatic foreign key. Storing requester_id 101 does not by itself guarantee that a user document with that ID exists. The application needs an appropriate rule for creating, updating, and deleting related identities.</a:t>
+              <a:t>A resident changes their email address. Look at the table and ask who owns each stored fact.</a:t>
+            </a:r>
+          </a:p>
+          <a:p xmlns:a="http://schemas.openxmlformats.org/drawingml/2006/main"/>
+          <a:p xmlns:a="http://schemas.openxmlformats.org/drawingml/2006/main">
+            <a:r>
+              <a:t>First row: requester_id 101. The ticket stores the relationship. When the email changes, the ID stays the same, because the person did not change. Second row: the current email for user 101. That belongs in one authoritative user document, so a correction updates one user record, once. The page reads the ticket, takes the requester ID, and reads that user's current contact details. That costs one extra read, and in exchange we avoid maintaining copies of a fact we promised is current. That is the note at the bottom: a copied current email would introduce another value to maintain.</a:t>
+            </a:r>
+          </a:p>
+          <a:p xmlns:a="http://schemas.openxmlformats.org/drawingml/2006/main"/>
+          <a:p xmlns:a="http://schemas.openxmlformats.org/drawingml/2006/main">
+            <a:r>
+              <a:t>The third row is the interesting one: requester_name_at_open. Suppose the business needs to keep the name shown when the request opened. That field is a deliberate historical snapshot. If the person later changes their display name, the snapshot keeping its original value is correct. It is not stale. It means something different.</a:t>
+            </a:r>
+          </a:p>
+          <a:p xmlns:a="http://schemas.openxmlformats.org/drawingml/2006/main"/>
+          <a:p xmlns:a="http://schemas.openxmlformats.org/drawingml/2006/main">
+            <a:r>
+              <a:t>The mistake is mixing those meanings without saying so. A field the application presents as the current email must follow the current-contact rule. A historical snapshot should be named as historical, the way this one says at_open. The database cannot read your intention from a vaguely named string.</a:t>
+            </a:r>
+          </a:p>
+          <a:p xmlns:a="http://schemas.openxmlformats.org/drawingml/2006/main"/>
+          <a:p xmlns:a="http://schemas.openxmlformats.org/drawingml/2006/main">
+            <a:r>
+              <a:t>One last point. Storing requester_id 101 does not create a foreign key. Nothing guarantees that user 101 exists. The application needs its own rules for creating, updating, and deleting related identities.</a:t>
             </a:r>
           </a:p>
         </p:txBody>
@@ -2245,47 +1985,31 @@
           <a:lstStyle xmlns:a="http://schemas.openxmlformats.org/drawingml/2006/main"/>
           <a:p xmlns:a="http://schemas.openxmlformats.org/drawingml/2006/main">
             <a:r>
-              <a:t>Here the ticket keeps its own fields and requester ID. Each event is a separate record with a ticket_id that identifies the ticket it belongs to. When a new event arrives, the system can add another event document without adding one more event object to the ticket itself.</a:t>
-            </a:r>
-          </a:p>
-          <a:p xmlns:a="http://schemas.openxmlformats.org/drawingml/2006/main">
-            <a:r>
-              <a:t/>
-            </a:r>
-          </a:p>
-          <a:p xmlns:a="http://schemas.openxmlformats.org/drawingml/2006/main">
-            <a:r>
-              <a:t>Notice that the ticket does not need an array listing every event ID. Such an array would move the growth problem rather than eliminate it. If every child event carries ticket_id, we can query the event collection for one ticket's history. The parent remains bounded even while the number of event records grows.</a:t>
-            </a:r>
-          </a:p>
-          <a:p xmlns:a="http://schemas.openxmlformats.org/drawingml/2006/main">
-            <a:r>
-              <a:t/>
-            </a:r>
-          </a:p>
-          <a:p xmlns:a="http://schemas.openxmlformats.org/drawingml/2006/main">
-            <a:r>
-              <a:t>The example shows event 5002 and uses the source-case field names event_type and event_at. It is a JSON sketch, so the timestamp is a string. In the runnable page demonstration, the driver stores event_at as a BSON date using a Python datetime. That allows us to sort consistently by a typed date rather than relying on every string following a compatible format.</a:t>
-            </a:r>
-          </a:p>
-          <a:p xmlns:a="http://schemas.openxmlformats.org/drawingml/2006/main">
-            <a:r>
-              <a:t/>
-            </a:r>
-          </a:p>
-          <a:p xmlns:a="http://schemas.openxmlformats.org/drawingml/2006/main">
-            <a:r>
-              <a:t>A reference names a relationship. It is not the same as automatically enforcing referential integrity, automatically creating an index, or automatically loading the referenced document. Those are separate design and implementation responsibilities.</a:t>
-            </a:r>
-          </a:p>
-          <a:p xmlns:a="http://schemas.openxmlformats.org/drawingml/2006/main">
-            <a:r>
-              <a:t/>
-            </a:r>
-          </a:p>
-          <a:p xmlns:a="http://schemas.openxmlformats.org/drawingml/2006/main">
-            <a:r>
-              <a:t>The next slide performs the actual retrievals. It will show the extra work needed to assemble a page from related records, which is the main read-side tradeoff of this simple referenced design.</a:t>
+              <a:t>Now the event history. Look at the two JSON snippets. The ticket on top keeps its own fields: ticket_id 1001, requester_id 101, status open. The event below is a separate record, event 5002, with its own ticket_id pointing back to 1001.</a:t>
+            </a:r>
+          </a:p>
+          <a:p xmlns:a="http://schemas.openxmlformats.org/drawingml/2006/main"/>
+          <a:p xmlns:a="http://schemas.openxmlformats.org/drawingml/2006/main">
+            <a:r>
+              <a:t>The direction of the reference matters. Read the first line of the box: each event points to its ticket, and the parent does not need an ever-growing ID list. If we put an array of every event ID inside the ticket, we would just move the growth problem from event objects to event IDs. When each child carries ticket_id instead, a new event is a new document in the event collection, and the ticket stays bounded. To get one ticket's history, we query the events by ticket_id.</a:t>
+            </a:r>
+          </a:p>
+          <a:p xmlns:a="http://schemas.openxmlformats.org/drawingml/2006/main"/>
+          <a:p xmlns:a="http://schemas.openxmlformats.org/drawingml/2006/main">
+            <a:r>
+              <a:t>Notice the field names here, event_type and event_at. Those are the source-case names from the CSV. Then read the second line of the box. This is a JSON sketch, so the timestamp is text. In the runnable page demo, the driver stores event_at as a BSON date from a Python datetime. That way we sort by a real date, not by strings we hope share a format.</a:t>
+            </a:r>
+          </a:p>
+          <a:p xmlns:a="http://schemas.openxmlformats.org/drawingml/2006/main"/>
+          <a:p xmlns:a="http://schemas.openxmlformats.org/drawingml/2006/main">
+            <a:r>
+              <a:t>And a reference only names a relationship. It does not enforce referential integrity, it does not create an index, and it does not load the other document for you.</a:t>
+            </a:r>
+          </a:p>
+          <a:p xmlns:a="http://schemas.openxmlformats.org/drawingml/2006/main"/>
+          <a:p xmlns:a="http://schemas.openxmlformats.org/drawingml/2006/main">
+            <a:r>
+              <a:t>The next slide does the actual reads, and shows the extra read-side work this simple referenced design costs.</a:t>
             </a:r>
           </a:p>
         </p:txBody>
@@ -2355,47 +2079,31 @@
           <a:lstStyle xmlns:a="http://schemas.openxmlformats.org/drawingml/2006/main"/>
           <a:p xmlns:a="http://schemas.openxmlformats.org/drawingml/2006/main">
             <a:r>
-              <a:t>This demonstration reads the ticket page in three steps. First it finds ticket 1001. Next it reads the person identified by that ticket's requester_id. Finally it queries history records whose ticket_id matches the ticket and returns only the two most recent ones.</a:t>
-            </a:r>
-          </a:p>
-          <a:p xmlns:a="http://schemas.openxmlformats.org/drawingml/2006/main">
-            <a:r>
-              <a:t/>
-            </a:r>
-          </a:p>
-          <a:p xmlns:a="http://schemas.openxmlformats.org/drawingml/2006/main">
-            <a:r>
-              <a:t>The history sort orders event_at descending, with event_id descending as a tie breaker. Limit two caps the number returned to the page. It does not delete older events from the collection. Our worked ticket has two events, so the displayed order is 5002 followed by 5001. Your lab ticket has three events, which makes the difference between displaying recent history and retaining full history observable.</a:t>
-            </a:r>
-          </a:p>
-          <a:p xmlns:a="http://schemas.openxmlformats.org/drawingml/2006/main">
-            <a:r>
-              <a:t/>
-            </a:r>
-          </a:p>
-          <a:p xmlns:a="http://schemas.openxmlformats.org/drawingml/2006/main">
-            <a:r>
-              <a:t>The example assumes the ticket and person exist in the supplied fixture. A real application should handle a missing ticket or a broken reference rather than indexing into None. The simple demonstration lets us focus on the intended data path before adding every production error branch.</a:t>
-            </a:r>
-          </a:p>
-          <a:p xmlns:a="http://schemas.openxmlformats.org/drawingml/2006/main">
-            <a:r>
-              <a:t/>
-            </a:r>
-          </a:p>
-          <a:p xmlns:a="http://schemas.openxmlformats.org/drawingml/2006/main">
-            <a:r>
-              <a:t>These reads also occur separately. A concurrent contact change or ticket update could happen between them, so this code does not provide one atomic snapshot across all three collections. Whether that matters depends on what the page promises.</a:t>
-            </a:r>
-          </a:p>
-          <a:p xmlns:a="http://schemas.openxmlformats.org/drawingml/2006/main">
-            <a:r>
-              <a:t/>
-            </a:r>
-          </a:p>
-          <a:p xmlns:a="http://schemas.openxmlformats.org/drawingml/2006/main">
-            <a:r>
-              <a:t>An index beginning with ticket_id and then the ordering fields can support this history access pattern. It is a design candidate, not a measured performance claim for our tiny collection. We will continue connecting queries, indexes, and actual observed work in later lessons.</a:t>
+              <a:t>Here is the ticket page assembled from referenced data, in three reads. Line one finds ticket 1001. Line two reads the person whose user_id equals the ticket's requester_id. Then the history query finds events whose ticket_id matches, and keeps only the two most recent.</a:t>
+            </a:r>
+          </a:p>
+          <a:p xmlns:a="http://schemas.openxmlformats.org/drawingml/2006/main"/>
+          <a:p xmlns:a="http://schemas.openxmlformats.org/drawingml/2006/main">
+            <a:r>
+              <a:t>Look at the sort: event_at descending, with event_id descending as the tie breaker. Then limit two. That limit caps what the page shows. It does not delete older events. History stays complete in the collection.</a:t>
+            </a:r>
+          </a:p>
+          <a:p xmlns:a="http://schemas.openxmlformats.org/drawingml/2006/main"/>
+          <a:p xmlns:a="http://schemas.openxmlformats.org/drawingml/2006/main">
+            <a:r>
+              <a:t>Watch the output in the box: open, Requester 101, then event IDs 5002 and 5001. Our worked ticket has only two events, so you see both. Your lab ticket has three events, and there the difference between displaying recent history and retaining full history becomes visible.</a:t>
+            </a:r>
+          </a:p>
+          <a:p xmlns:a="http://schemas.openxmlformats.org/drawingml/2006/main"/>
+          <a:p xmlns:a="http://schemas.openxmlformats.org/drawingml/2006/main">
+            <a:r>
+              <a:t>Two honest caveats. First, this code assumes the ticket and the person exist in the fixture. A real application has to handle a missing ticket or a broken reference instead of indexing into None. Second, read the next line of the box: three reads assemble one page, and they are not one atomic snapshot. A contact change or a ticket update could land between reads. Whether that matters depends on what the page promises.</a:t>
+            </a:r>
+          </a:p>
+          <a:p xmlns:a="http://schemas.openxmlformats.org/drawingml/2006/main"/>
+          <a:p xmlns:a="http://schemas.openxmlformats.org/drawingml/2006/main">
+            <a:r>
+              <a:t>Last line. An event index that starts with ticket_id and then the ordering fields can support this read. That is a design candidate, not a measured performance claim, because our collection is tiny. We will keep connecting queries, indexes, and observed work in later lessons.</a:t>
             </a:r>
           </a:p>
         </p:txBody>
@@ -2465,54 +2173,40 @@
           <a:lstStyle xmlns:a="http://schemas.openxmlformats.org/drawingml/2006/main"/>
           <a:p xmlns:a="http://schemas.openxmlformats.org/drawingml/2006/main">
             <a:r>
-              <a:t>There are several defensible ways to handle event history. Embedding every event makes the ticket and its history convenient to read together, and a related status change and append can be one document update. But each event enlarges the same ticket document.</a:t>
-            </a:r>
-          </a:p>
-          <a:p xmlns:a="http://schemas.openxmlformats.org/drawingml/2006/main">
-            <a:r>
-              <a:t/>
-            </a:r>
-          </a:p>
-          <a:p xmlns:a="http://schemas.openxmlformats.org/drawingml/2006/main">
-            <a:r>
-              <a:t>MongoDB's maximum BSON document size is sixteen mebibytes. We should not treat that limit as a performance target. Large documents, frequent updates, and the need to inspect only a small part of history can become awkward before the hard limit is reached. The limit also does not translate into one universal maximum number of events, because event sizes vary.</a:t>
-            </a:r>
-          </a:p>
-          <a:p xmlns:a="http://schemas.openxmlformats.org/drawingml/2006/main">
-            <a:r>
-              <a:t/>
-            </a:r>
-          </a:p>
-          <a:p xmlns:a="http://schemas.openxmlformats.org/drawingml/2006/main">
-            <a:r>
-              <a:t>Keeping all events separately leaves the ticket bounded. The page retrieves a limited, ordered subset of history, and a report can query events across tickets. The cost is extra retrieval and coordination when an application operation changes both the ticket and an event record.</a:t>
-            </a:r>
-          </a:p>
-          <a:p xmlns:a="http://schemas.openxmlformats.org/drawingml/2006/main">
-            <a:r>
-              <a:t/>
-            </a:r>
-          </a:p>
-          <a:p xmlns:a="http://schemas.openxmlformats.org/drawingml/2006/main">
-            <a:r>
-              <a:t>A hybrid could keep the authoritative history separately and copy a small recent-event preview into the ticket. The preview needs a cap and a refresh rule. We must decide what happens when its refresh fails or arrives late. Copying data introduces work even when the read becomes convenient.</a:t>
-            </a:r>
-          </a:p>
-          <a:p xmlns:a="http://schemas.openxmlformats.org/drawingml/2006/main">
-            <a:r>
-              <a:t/>
-            </a:r>
-          </a:p>
-          <a:p xmlns:a="http://schemas.openxmlformats.org/drawingml/2006/main">
-            <a:r>
-              <a:t>For a beginner project, choose the simplest design that meets the stated requirement. A hybrid is not a required upgrade or a sign that a project is more sophisticated. An accurately explained referenced model can be a stronger solution.</a:t>
-            </a:r>
-          </a:p>
-          <a:p xmlns:a="http://schemas.openxmlformats.org/drawingml/2006/main">
-            <a:r>
-              <a:t/>
-            </a:r>
-          </a:p>
+              <a:t>How should event history be stored? The table gives three defensible answers, and in each one something grows.</a:t>
+            </a:r>
+          </a:p>
+          <a:p xmlns:a="http://schemas.openxmlformats.org/drawingml/2006/main"/>
+          <a:p xmlns:a="http://schemas.openxmlformats.org/drawingml/2006/main">
+            <a:r>
+              <a:t>First row: embed every event. The ticket document grows with each event. The page gets everything in one read, and a status change plus an append can be one atomic update. But that same document keeps getting bigger.</a:t>
+            </a:r>
+          </a:p>
+          <a:p xmlns:a="http://schemas.openxmlformats.org/drawingml/2006/main"/>
+          <a:p xmlns:a="http://schemas.openxmlformats.org/drawingml/2006/main">
+            <a:r>
+              <a:t>How big can it get? Read the box. A BSON document has a 16 MiB size limit. Do not treat that as a target. Large documents, frequent updates, and pages that only want a small slice of history get awkward long before the hard limit. And the limit does not translate into a maximum number of events, because events vary in size.</a:t>
+            </a:r>
+          </a:p>
+          <a:p xmlns:a="http://schemas.openxmlformats.org/drawingml/2006/main"/>
+          <a:p xmlns:a="http://schemas.openxmlformats.org/drawingml/2006/main">
+            <a:r>
+              <a:t>Second row: keep all events separate. What grows is the number of event documents, and the ticket stays bounded. The page does a ticket read plus a bounded history query, and a report can query events across tickets. The cost is extra retrieval, and coordination when one operation changes both a ticket and an event.</a:t>
+            </a:r>
+          </a:p>
+          <a:p xmlns:a="http://schemas.openxmlformats.org/drawingml/2006/main"/>
+          <a:p xmlns:a="http://schemas.openxmlformats.org/drawingml/2006/main">
+            <a:r>
+              <a:t>Third row: a hybrid. The authoritative history lives separately, and the ticket carries a small capped copy of recent events. Convenient for the page. But read the last box: that copy needs an explicit refresh and stale-data policy. Copying data always creates work.</a:t>
+            </a:r>
+          </a:p>
+          <a:p xmlns:a="http://schemas.openxmlformats.org/drawingml/2006/main"/>
+          <a:p xmlns:a="http://schemas.openxmlformats.org/drawingml/2006/main">
+            <a:r>
+              <a:t>For a beginner project, choose the simplest design that meets the requirement. A hybrid is not a required upgrade. An accurately explained referenced model can be the stronger answer.</a:t>
+            </a:r>
+          </a:p>
+          <a:p xmlns:a="http://schemas.openxmlformats.org/drawingml/2006/main"/>
           <a:p xmlns:a="http://schemas.openxmlformats.org/drawingml/2006/main">
             <a:r>
               <a:t>Sources:</a:t>
@@ -2590,54 +2284,34 @@
           <a:lstStyle xmlns:a="http://schemas.openxmlformats.org/drawingml/2006/main"/>
           <a:p xmlns:a="http://schemas.openxmlformats.org/drawingml/2006/main">
             <a:r>
-              <a:t>A modeling recommendation should explain a concrete consequence. Keeping the authoritative user record separate means that a contact correction updates one place. Keeping complete event history separate means that each new event increases the event collection rather than the ticket document. Those are useful properties for the stated workload.</a:t>
-            </a:r>
-          </a:p>
-          <a:p xmlns:a="http://schemas.openxmlformats.org/drawingml/2006/main">
-            <a:r>
-              <a:t/>
-            </a:r>
-          </a:p>
-          <a:p xmlns:a="http://schemas.openxmlformats.org/drawingml/2006/main">
-            <a:r>
-              <a:t>They also have costs. The page must retrieve related records, and independent reads can observe different moments if concurrent writes occur. If the page requires a consistent version of all those facts, the application needs a stronger coordination approach than the three plain reads we just showed. If eventual consistency is acceptable for a recent-events preview, the application should state that promise rather than accidentally delivering it.</a:t>
-            </a:r>
-          </a:p>
-          <a:p xmlns:a="http://schemas.openxmlformats.org/drawingml/2006/main">
-            <a:r>
-              <a:t/>
-            </a:r>
-          </a:p>
-          <a:p xmlns:a="http://schemas.openxmlformats.org/drawingml/2006/main">
-            <a:r>
-              <a:t>We should apply the same rigor to vendor comparisons. Relational database design also considers workloads. PostgreSQL supports arrays and JSON, and SQL systems do not force every schema to be in third normal form. Normalization is a design discipline, not a setting imposed automatically on every table. Joins have costs that depend on the query, data, and indexes; they are not inherently unacceptable.</a:t>
-            </a:r>
-          </a:p>
-          <a:p xmlns:a="http://schemas.openxmlformats.org/drawingml/2006/main">
-            <a:r>
-              <a:t/>
-            </a:r>
-          </a:p>
-          <a:p xmlns:a="http://schemas.openxmlformats.org/drawingml/2006/main">
-            <a:r>
-              <a:t>Likewise, MongoDB's flexible document structure does not remove the need to define meaning or enforce rules. We can appreciate the benefits of each system without treating an introductory vendor simplification as a universal technical fact.</a:t>
-            </a:r>
-          </a:p>
-          <a:p xmlns:a="http://schemas.openxmlformats.org/drawingml/2006/main">
-            <a:r>
-              <a:t/>
-            </a:r>
-          </a:p>
-          <a:p xmlns:a="http://schemas.openxmlformats.org/drawingml/2006/main">
-            <a:r>
-              <a:t>In your design response, name a benefit and the work required to obtain it. That is more informative than simply calling a model flexible, modern, or scalable.</a:t>
-            </a:r>
-          </a:p>
-          <a:p xmlns:a="http://schemas.openxmlformats.org/drawingml/2006/main">
-            <a:r>
-              <a:t/>
-            </a:r>
-          </a:p>
+              <a:t>When you recommend a model, say what it actually does. Look at the first box. A separate user record means a contact correction happens once. Separate event records mean complete history is kept without enlarging the ticket. Those are concrete consequences for our workload, and you can check them.</a:t>
+            </a:r>
+          </a:p>
+          <a:p xmlns:a="http://schemas.openxmlformats.org/drawingml/2006/main"/>
+          <a:p xmlns:a="http://schemas.openxmlformats.org/drawingml/2006/main">
+            <a:r>
+              <a:t>Now the cost, in the same box. The page has to retrieve the related records, and those independent reads can see different moments if writes happen in between. If the page needs one consistent version of everything, the application needs stronger coordination than the three plain reads we just ran. If a slightly behind recent-events preview is acceptable, the application should state that promise rather than deliver it by accident.</a:t>
+            </a:r>
+          </a:p>
+          <a:p xmlns:a="http://schemas.openxmlformats.org/drawingml/2006/main"/>
+          <a:p xmlns:a="http://schemas.openxmlformats.org/drawingml/2006/main">
+            <a:r>
+              <a:t>The second box applies the same rigor to vendors. Workloads matter in PostgreSQL too. PostgreSQL supports arrays and JSON. SQL systems do not force every schema into third normal form. Normalization is a design discipline, not a setting applied automatically to every table. And joins are not inherently unacceptable. Their cost depends on the query, the data, and the indexes.</a:t>
+            </a:r>
+          </a:p>
+          <a:p xmlns:a="http://schemas.openxmlformats.org/drawingml/2006/main"/>
+          <a:p xmlns:a="http://schemas.openxmlformats.org/drawingml/2006/main">
+            <a:r>
+              <a:t>Likewise, MongoDB's flexible documents do not remove the need to define what fields mean and to enforce rules. Read the last line: neither a SQL table nor a MongoDB collection chooses a good model for us.</a:t>
+            </a:r>
+          </a:p>
+          <a:p xmlns:a="http://schemas.openxmlformats.org/drawingml/2006/main"/>
+          <a:p xmlns:a="http://schemas.openxmlformats.org/drawingml/2006/main">
+            <a:r>
+              <a:t>So in your design response, name one benefit and the work required to get it. That says far more than calling a model flexible, modern, or scalable.</a:t>
+            </a:r>
+          </a:p>
+          <a:p xmlns:a="http://schemas.openxmlformats.org/drawingml/2006/main"/>
           <a:p xmlns:a="http://schemas.openxmlformats.org/drawingml/2006/main">
             <a:r>
               <a:t>Sources:</a:t>
@@ -2725,44 +2399,34 @@
           <a:lstStyle xmlns:a="http://schemas.openxmlformats.org/drawingml/2006/main"/>
           <a:p xmlns:a="http://schemas.openxmlformats.org/drawingml/2006/main">
             <a:r>
-              <a:t>Your individual MongoDB University activity is Lesson 4, Modeling One-to-Many, including its Practice activity. The weekly guide has direct links to both the lesson and practice page. The instructor example used Lesson 3, so you are not repeating the same assigned activity. A complete course badge is not required.</a:t>
-            </a:r>
-          </a:p>
-          <a:p xmlns:a="http://schemas.openxmlformats.org/drawingml/2006/main">
-            <a:r>
-              <a:t/>
-            </a:r>
-          </a:p>
-          <a:p xmlns:a="http://schemas.openxmlformats.org/drawingml/2006/main">
-            <a:r>
-              <a:t>After the practice, revise one JSON design for ticket 1003. Use the same CSV facts you met last week, but apply the new requirement: the page displays only the latest two events, newest first, while the system retains the entire history. The current contact details must be editable in one authoritative user record.</a:t>
-            </a:r>
-          </a:p>
-          <a:p xmlns:a="http://schemas.openxmlformats.org/drawingml/2006/main">
-            <a:r>
-              <a:t/>
-            </a:r>
-          </a:p>
-          <a:p xmlns:a="http://schemas.openxmlformats.org/drawingml/2006/main">
-            <a:r>
-              <a:t>You are not writing two new competing JSON files or building a web application. Show one representative ticket document. If related facts live elsewhere, include a small example of that related document so the relationship is understandable. In a short explanation to the developer implementing the page, name the two event IDs the page should show and explain the retrieval and contact-update path. Also explain how the design behaves if the ticket eventually has fifty thousand events.</a:t>
-            </a:r>
-          </a:p>
-          <a:p xmlns:a="http://schemas.openxmlformats.org/drawingml/2006/main">
-            <a:r>
-              <a:t/>
-            </a:r>
-          </a:p>
-          <a:p xmlns:a="http://schemas.openxmlformats.org/drawingml/2006/main">
-            <a:r>
-              <a:t>Submit the JSON and explanation as one Brightspace text response, with the Lesson 4 Practice progress image. If the external platform or account access fails, use the chapter's worked examples and state that substitution in the same response. The design work still matters, but there is no need to invent a score or complete the entire vendor course.</a:t>
-            </a:r>
-          </a:p>
-          <a:p xmlns:a="http://schemas.openxmlformats.org/drawingml/2006/main">
-            <a:r>
-              <a:t/>
-            </a:r>
-          </a:p>
+              <a:t>Here is Lab 2. In the weekly guide it is called Design the Ticket Page. Start with the link at the top: MongoDB University, Modeling Data Relationships, Lesson 4, Modeling One-to-Many, including its Practice. The Week 10 guide links directly to both. My demo used Lesson 3, so you are not repeating my activity. No complete course badge is needed.</a:t>
+            </a:r>
+          </a:p>
+          <a:p xmlns:a="http://schemas.openxmlformats.org/drawingml/2006/main"/>
+          <a:p xmlns:a="http://schemas.openxmlformats.org/drawingml/2006/main">
+            <a:r>
+              <a:t>Then the design work, in the middle box. Revise one JSON design for ticket 1003. Use the same CSV facts from last week, with a new requirement. The page shows only the latest two events, newest first. The system retains the entire history. And the current contact details are editable in one authoritative user record.</a:t>
+            </a:r>
+          </a:p>
+          <a:p xmlns:a="http://schemas.openxmlformats.org/drawingml/2006/main"/>
+          <a:p xmlns:a="http://schemas.openxmlformats.org/drawingml/2006/main">
+            <a:r>
+              <a:t>You are not writing two competing JSON files or building an application. Show one representative ticket document. If related facts live somewhere else, include one small example of that related document, so the relationship is clear.</a:t>
+            </a:r>
+          </a:p>
+          <a:p xmlns:a="http://schemas.openxmlformats.org/drawingml/2006/main"/>
+          <a:p xmlns:a="http://schemas.openxmlformats.org/drawingml/2006/main">
+            <a:r>
+              <a:t>Then write a short explanation to the developer who will build the page. Name the two event IDs the page should show. Explain how the page retrieves them, and where a contact change happens. And tell them how your design behaves if this ticket eventually has fifty thousand events.</a:t>
+            </a:r>
+          </a:p>
+          <a:p xmlns:a="http://schemas.openxmlformats.org/drawingml/2006/main"/>
+          <a:p xmlns:a="http://schemas.openxmlformats.org/drawingml/2006/main">
+            <a:r>
+              <a:t>Read the bottom box. Submit it all as one Brightspace text response: the JSON, the explanation, and the Lesson 4 Practice progress image. If the platform or your account is unavailable, use the chapter's worked examples and say so in the same response. Do not invent a score.</a:t>
+            </a:r>
+          </a:p>
+          <a:p xmlns:a="http://schemas.openxmlformats.org/drawingml/2006/main"/>
           <a:p xmlns:a="http://schemas.openxmlformats.org/drawingml/2006/main">
             <a:r>
               <a:t>Sources:</a:t>
@@ -2845,47 +2509,37 @@
           <a:lstStyle xmlns:a="http://schemas.openxmlformats.org/drawingml/2006/main"/>
           <a:p xmlns:a="http://schemas.openxmlformats.org/drawingml/2006/main">
             <a:r>
-              <a:t>This is one way to describe the skill in a professional conversation. It begins with something specific: testing a query against a fixture. It names an actual mistake, the array predicate that can combine conditions from different events, and explains how a counterexample exposed that mistake.</a:t>
-            </a:r>
-          </a:p>
-          <a:p xmlns:a="http://schemas.openxmlformats.org/drawingml/2006/main">
-            <a:r>
-              <a:t/>
-            </a:r>
-          </a:p>
-          <a:p xmlns:a="http://schemas.openxmlformats.org/drawingml/2006/main">
-            <a:r>
-              <a:t>The description then connects write-result counts with a follow-up read. That is more credible than saying only that you know CRUD. You can explain the difference between a request that changed a document, a request whose desired values were already present, and a request whose expected-state filter no longer matched.</a:t>
-            </a:r>
-          </a:p>
-          <a:p xmlns:a="http://schemas.openxmlformats.org/drawingml/2006/main">
-            <a:r>
-              <a:t/>
-            </a:r>
-          </a:p>
-          <a:p xmlns:a="http://schemas.openxmlformats.org/drawingml/2006/main">
-            <a:r>
-              <a:t>Finally, it explains a modeling decision in terms of the application. Shared contact details and growing event history create different requirements. A good answer acknowledges the extra reads and consistency choices rather than promising that one representation is always faster.</a:t>
-            </a:r>
-          </a:p>
-          <a:p xmlns:a="http://schemas.openxmlformats.org/drawingml/2006/main">
-            <a:r>
-              <a:t/>
-            </a:r>
-          </a:p>
-          <a:p xmlns:a="http://schemas.openxmlformats.org/drawingml/2006/main">
-            <a:r>
-              <a:t>Adapt that language to what you actually performed. If you used the local teaching substitute, say that you tested the query logic locally. Do not imply that you operated a production Atlas service or measured large-scale performance. If you successfully connected to Atlas, you can also describe the separate database user, runtime IP rule, and secure connection setup you used.</a:t>
-            </a:r>
-          </a:p>
-          <a:p xmlns:a="http://schemas.openxmlformats.org/drawingml/2006/main">
-            <a:r>
-              <a:t/>
-            </a:r>
-          </a:p>
-          <a:p xmlns:a="http://schemas.openxmlformats.org/drawingml/2006/main">
-            <a:r>
-              <a:t>The next lesson builds on these foundations. We will aggregate results across documents and enforce document rules. Keep the same habit: state the question, identify the unit of data, predict an observable result, and check what the system actually did.</a:t>
+              <a:t>Last slide: how you talk about this work. Read the paragraph in the middle. It is one way to describe this week's skill in an interview or a team meeting.</a:t>
+            </a:r>
+          </a:p>
+          <a:p xmlns:a="http://schemas.openxmlformats.org/drawingml/2006/main"/>
+          <a:p xmlns:a="http://schemas.openxmlformats.org/drawingml/2006/main">
+            <a:r>
+              <a:t>It starts with something specific. "I tested a document query against a small fixture." Then it names a real mistake, the array filter whose conditions matched different events, and says how it was caught: a counterexample. That beats "I know MongoDB."</a:t>
+            </a:r>
+          </a:p>
+          <a:p xmlns:a="http://schemas.openxmlformats.org/drawingml/2006/main"/>
+          <a:p xmlns:a="http://schemas.openxmlformats.org/drawingml/2006/main">
+            <a:r>
+              <a:t>Next it connects write counts with a read-back. You can now explain three different outcomes. A request that changed a document. A request whose values were already there. And a request whose expected-state filter no longer matched.</a:t>
+            </a:r>
+          </a:p>
+          <a:p xmlns:a="http://schemas.openxmlformats.org/drawingml/2006/main"/>
+          <a:p xmlns:a="http://schemas.openxmlformats.org/drawingml/2006/main">
+            <a:r>
+              <a:t>Then it explains a modeling choice in application terms. Shared contact details and growing history have different requirements, and the description admits the extra reads and consistency tradeoffs instead of promising that one shape is always faster.</a:t>
+            </a:r>
+          </a:p>
+          <a:p xmlns:a="http://schemas.openxmlformats.org/drawingml/2006/main"/>
+          <a:p xmlns:a="http://schemas.openxmlformats.org/drawingml/2006/main">
+            <a:r>
+              <a:t>Read the first line of the bottom box: describe the experiment you actually performed. If you used local mode, say you tested the query logic locally. Do not imply you operated a production Atlas service or measured performance at scale. If you did connect to Atlas, you can also describe the separate database user, the runtime IP rule, and the secure connection setup.</a:t>
+            </a:r>
+          </a:p>
+          <a:p xmlns:a="http://schemas.openxmlformats.org/drawingml/2006/main"/>
+          <a:p xmlns:a="http://schemas.openxmlformats.org/drawingml/2006/main">
+            <a:r>
+              <a:t>And the second line. Next week we aggregate results across documents and enforce document rules. Keep the same habit: state the question, identify the unit of data, predict an observable result, and check what the system actually did.</a:t>
             </a:r>
           </a:p>
         </p:txBody>
@@ -3025,54 +2679,28 @@
           <a:lstStyle xmlns:a="http://schemas.openxmlformats.org/drawingml/2006/main"/>
           <a:p xmlns:a="http://schemas.openxmlformats.org/drawingml/2006/main">
             <a:r>
-              <a:t>This is an Atlas interface capture from August 2026. The deployment appears in the tree, but the main workspace still asks for a connection. That combination is worth understanding. Seeing a deployment in the management website does not establish that our Python program has successfully queried it.</a:t>
-            </a:r>
-          </a:p>
-          <a:p xmlns:a="http://schemas.openxmlformats.org/drawingml/2006/main">
-            <a:r>
-              <a:t/>
-            </a:r>
-          </a:p>
-          <a:p xmlns:a="http://schemas.openxmlformats.org/drawingml/2006/main">
-            <a:r>
-              <a:t>An Atlas project groups cloud administration settings and resources. A cluster is the deployed database service. Within the database service, a database contains collections, and a collection contains BSON documents. Our notebook chooses a fresh database name and works in a collection called tickets. We are not creating a new cloud cluster for each notebook run.</a:t>
-            </a:r>
-          </a:p>
-          <a:p xmlns:a="http://schemas.openxmlformats.org/drawingml/2006/main">
-            <a:r>
-              <a:t/>
-            </a:r>
-          </a:p>
-          <a:p xmlns:a="http://schemas.openxmlformats.org/drawingml/2006/main">
-            <a:r>
-              <a:t>The website login and the database user have different jobs. The website account lets a person manage the project according to their permissions. The database user authenticates a client connection and has permissions for database operations. Having one does not automatically mean that every action available to the other is allowed.</a:t>
-            </a:r>
-          </a:p>
-          <a:p xmlns:a="http://schemas.openxmlformats.org/drawingml/2006/main">
-            <a:r>
-              <a:t/>
-            </a:r>
-          </a:p>
-          <a:p xmlns:a="http://schemas.openxmlformats.org/drawingml/2006/main">
-            <a:r>
-              <a:t>We also need a reachable network path. If the explorer has not connected, we cannot infer from an empty workspace that our application's collection is empty. We first establish the connection, select the intended database and collection, and then run a query whose meaning we understand.</a:t>
-            </a:r>
-          </a:p>
-          <a:p xmlns:a="http://schemas.openxmlformats.org/drawingml/2006/main">
-            <a:r>
-              <a:t/>
-            </a:r>
-          </a:p>
-          <a:p xmlns:a="http://schemas.openxmlformats.org/drawingml/2006/main">
-            <a:r>
-              <a:t>The names in this capture are redacted. We are using it to locate the layers, not as a picture of a successful data operation or an exact promise about the placement of every current button.</a:t>
-            </a:r>
-          </a:p>
-          <a:p xmlns:a="http://schemas.openxmlformats.org/drawingml/2006/main">
-            <a:r>
-              <a:t/>
-            </a:r>
-          </a:p>
+              <a:t>This is a capture of the Atlas interface from August 2026, with the names redacted. Look at the left side: the deployment shows up in the tree. Now look at the main workspace: it is still asking for a connection. Read the caption at the bottom. This is not a successful query result. I am showing it on purpose, because seeing your cluster in a website proves nothing about whether your Python program can query it.</a:t>
+            </a:r>
+          </a:p>
+          <a:p xmlns:a="http://schemas.openxmlformats.org/drawingml/2006/main"/>
+          <a:p xmlns:a="http://schemas.openxmlformats.org/drawingml/2006/main">
+            <a:r>
+              <a:t>Look at the four layers in the box. A project groups cloud administration settings and resources. A cluster is the database service actually running. Inside it, a database holds collections, and a collection holds BSON documents. Our notebook picks a fresh database name and works in a collection called tickets. We do not create a new cluster every time we run the notebook.</a:t>
+            </a:r>
+          </a:p>
+          <a:p xmlns:a="http://schemas.openxmlformats.org/drawingml/2006/main"/>
+          <a:p xmlns:a="http://schemas.openxmlformats.org/drawingml/2006/main">
+            <a:r>
+              <a:t>Two different logins are involved here, and people mix them up constantly. Your website account lets you manage the project. A database user authenticates your program's connection and carries the data permissions. Having one does not give you the other.</a:t>
+            </a:r>
+          </a:p>
+          <a:p xmlns:a="http://schemas.openxmlformats.org/drawingml/2006/main"/>
+          <a:p xmlns:a="http://schemas.openxmlformats.org/drawingml/2006/main">
+            <a:r>
+              <a:t>And there has to be a reachable network path. If the explorer never connected, an empty workspace does not mean your collection is empty. It means you have not asked yet. So the order is always the same: connect, choose the right database and collection, then run a query whose meaning you understand. Use this picture to locate the layers, not as a promise about where every button sits today.</a:t>
+            </a:r>
+          </a:p>
+          <a:p xmlns:a="http://schemas.openxmlformats.org/drawingml/2006/main"/>
           <a:p xmlns:a="http://schemas.openxmlformats.org/drawingml/2006/main">
             <a:r>
               <a:t>Sources:</a:t>
@@ -3155,54 +2783,28 @@
           <a:lstStyle xmlns:a="http://schemas.openxmlformats.org/drawingml/2006/main"/>
           <a:p xmlns:a="http://schemas.openxmlformats.org/drawingml/2006/main">
             <a:r>
-              <a:t>A Colab notebook displays in your browser, but the Python code runs on a remote runtime. That distinction explains a common connection problem. The button that adds the current IP address in your laptop's Atlas browser may add your laptop's outgoing address. Atlas needs to allow the address from which the Python connection actually arrives.</a:t>
-            </a:r>
-          </a:p>
-          <a:p xmlns:a="http://schemas.openxmlformats.org/drawingml/2006/main">
-            <a:r>
-              <a:t/>
-            </a:r>
-          </a:p>
-          <a:p xmlns:a="http://schemas.openxmlformats.org/drawingml/2006/main">
-            <a:r>
-              <a:t>The notebook therefore has a separate setup cell before the connection. If you choose Atlas mode, that cell asks a public IP service for the runtime's outgoing IPv4 address. It prints the address with slash thirty-two, which identifies one IPv4 address. It also prints a new practice database name. No database password is sent to the IP service.</a:t>
-            </a:r>
-          </a:p>
-          <a:p xmlns:a="http://schemas.openxmlformats.org/drawingml/2006/main">
-            <a:r>
-              <a:t/>
-            </a:r>
-          </a:p>
-          <a:p xmlns:a="http://schemas.openxmlformats.org/drawingml/2006/main">
-            <a:r>
-              <a:t>In Atlas, add that printed address as a temporary entry and wait for it to become active. Use a database user with the required access to your practice database. Then copy the driver URI and enter it in the notebook's hidden prompt. Keep it out of ordinary source cells and printed output.</a:t>
-            </a:r>
-          </a:p>
-          <a:p xmlns:a="http://schemas.openxmlformats.org/drawingml/2006/main">
-            <a:r>
-              <a:t/>
-            </a:r>
-          </a:p>
-          <a:p xmlns:a="http://schemas.openxmlformats.org/drawingml/2006/main">
-            <a:r>
-              <a:t>The connection cell sends ping. A response establishes that the server answered, but the later insert still has to succeed under the user's data permissions. Keep certificate verification enabled even when troubleshooting. A broad allow-everywhere rule or an insecure TLS option can conceal the real issue while weakening protection.</a:t>
-            </a:r>
-          </a:p>
-          <a:p xmlns:a="http://schemas.openxmlformats.org/drawingml/2006/main">
-            <a:r>
-              <a:t/>
-            </a:r>
-          </a:p>
-          <a:p xmlns:a="http://schemas.openxmlformats.org/drawingml/2006/main">
-            <a:r>
-              <a:t>If the cloud path is unavailable, use local mode for the query lesson. We will distinguish that local exercise from having tested Atlas networking.</a:t>
-            </a:r>
-          </a:p>
-          <a:p xmlns:a="http://schemas.openxmlformats.org/drawingml/2006/main">
-            <a:r>
-              <a:t/>
-            </a:r>
-          </a:p>
+              <a:t>Here is a trap that catches almost everyone the first time. Colab shows up in your browser, but your Python code does not run on your laptop. It runs on a remote runtime. So when Atlas offers a button to add your current IP address, it may add your laptop's address, while the connection actually arrives from somewhere else. Atlas refuses it.</a:t>
+            </a:r>
+          </a:p>
+          <a:p xmlns:a="http://schemas.openxmlformats.org/drawingml/2006/main"/>
+          <a:p xmlns:a="http://schemas.openxmlformats.org/drawingml/2006/main">
+            <a:r>
+              <a:t>That is why the notebook has a setup cell before the connection, and the table walks through it. Row one: if you choose Atlas mode, the cell asks a public IP service for the runtime's outgoing IPv4 address and prints it with slash thirty-two, which means exactly one address. It also prints a new practice database name. No database password goes to that IP service. Row two: in Atlas, add that printed address as a temporary entry and wait until it is active. Row three: use a database user, not your website login, and enter the driver URI in the hidden prompt, so it never sits in a source cell or in printed output.</a:t>
+            </a:r>
+          </a:p>
+          <a:p xmlns:a="http://schemas.openxmlformats.org/drawingml/2006/main"/>
+          <a:p xmlns:a="http://schemas.openxmlformats.org/drawingml/2006/main">
+            <a:r>
+              <a:t>Row four: the connection cell sends ping. A reply proves the server answered. The insert after it still has to pass the user's data permissions.</a:t>
+            </a:r>
+          </a:p>
+          <a:p xmlns:a="http://schemas.openxmlformats.org/drawingml/2006/main"/>
+          <a:p xmlns:a="http://schemas.openxmlformats.org/drawingml/2006/main">
+            <a:r>
+              <a:t>Read the box. Keep TLS verification on, and never allow access from everywhere. Those shortcuts hide the real problem and weaken protection. And if the cloud path is not working today, local mode teaches the same queries without an Atlas account.</a:t>
+            </a:r>
+          </a:p>
+          <a:p xmlns:a="http://schemas.openxmlformats.org/drawingml/2006/main"/>
           <a:p xmlns:a="http://schemas.openxmlformats.org/drawingml/2006/main">
             <a:r>
               <a:t>Sources:</a:t>
@@ -3285,54 +2887,34 @@
           <a:lstStyle xmlns:a="http://schemas.openxmlformats.org/drawingml/2006/main"/>
           <a:p xmlns:a="http://schemas.openxmlformats.org/drawingml/2006/main">
             <a:r>
-              <a:t>Several representations in this course resemble one another, so we need to keep their execution contexts clear. Strict JSON is a text format. Python has dictionaries and lists, with Python's own literals and function calls. Mongosh is a JavaScript-based database shell with its own helper functions.</a:t>
-            </a:r>
-          </a:p>
-          <a:p xmlns:a="http://schemas.openxmlformats.org/drawingml/2006/main">
-            <a:r>
-              <a:t/>
-            </a:r>
-          </a:p>
-          <a:p xmlns:a="http://schemas.openxmlformats.org/drawingml/2006/main">
-            <a:r>
-              <a:t>In a Python dictionary, the missing-value literal is None, with a capital N. The Boolean literals are True and False. In JSON and JavaScript, the corresponding literals use lowercase spelling. Copying null into a Python cell does not turn it into the correct Python value.</a:t>
-            </a:r>
-          </a:p>
-          <a:p xmlns:a="http://schemas.openxmlformats.org/drawingml/2006/main">
-            <a:r>
-              <a:t/>
-            </a:r>
-          </a:p>
-          <a:p xmlns:a="http://schemas.openxmlformats.org/drawingml/2006/main">
-            <a:r>
-              <a:t>The operation names also reflect the host tool. PyMongo uses find_one and modified_count with underscores. The shell uses findOne and modifiedCount. We will use Python in the slides and notebook. Chapter 10 explicitly labels its runnable shell listings, so the shell examples should run in a shell rather than being pasted unchanged into Colab.</a:t>
-            </a:r>
-          </a:p>
-          <a:p xmlns:a="http://schemas.openxmlformats.org/drawingml/2006/main">
-            <a:r>
-              <a:t/>
-            </a:r>
-          </a:p>
-          <a:p xmlns:a="http://schemas.openxmlformats.org/drawingml/2006/main">
-            <a:r>
-              <a:t>Dates deserve particular attention. A string that looks like an ISO timestamp remains a string unless a conversion creates a typed date. Our Python fixture passes datetime objects through the driver. MongoDB stores those as BSON dates. In mongosh, ISODate constructs a date value. Neither function call is legal strict JSON.</a:t>
-            </a:r>
-          </a:p>
-          <a:p xmlns:a="http://schemas.openxmlformats.org/drawingml/2006/main">
-            <a:r>
-              <a:t/>
-            </a:r>
-          </a:p>
-          <a:p xmlns:a="http://schemas.openxmlformats.org/drawingml/2006/main">
-            <a:r>
-              <a:t>The purpose is not to memorize every spelling now. Identify the environment first, then read the example in that environment. That habit prevents many apparent database errors that are really language errors.</a:t>
-            </a:r>
-          </a:p>
-          <a:p xmlns:a="http://schemas.openxmlformats.org/drawingml/2006/main">
-            <a:r>
-              <a:t/>
-            </a:r>
-          </a:p>
+              <a:t>This slide is here to save you an hour of confusion. Three things in this course look alike and run in different places. JSON is a text format. Python has dictionaries and lists with its own spelling. And mongosh is MongoDB's shell, which is JavaScript.</a:t>
+            </a:r>
+          </a:p>
+          <a:p xmlns:a="http://schemas.openxmlformats.org/drawingml/2006/main"/>
+          <a:p xmlns:a="http://schemas.openxmlformats.org/drawingml/2006/main">
+            <a:r>
+              <a:t>Look at the first two rows. In Python, a missing value is None with a capital N, and the Booleans are True and False with capitals. In JSON and in the shell they are lowercase: null, true, false. If you paste null into a Python cell, you do not get Python's missing value. You get an error.</a:t>
+            </a:r>
+          </a:p>
+          <a:p xmlns:a="http://schemas.openxmlformats.org/drawingml/2006/main"/>
+          <a:p xmlns:a="http://schemas.openxmlformats.org/drawingml/2006/main">
+            <a:r>
+              <a:t>The next two rows are operation names. PyMongo uses underscores: find_one, modified_count. The shell uses capitals in the middle: findOne, modifiedCount. Same operation, different host language. Our slides and notebook use Python. Chapter 10 labels its runnable shell examples, so run those in a shell, and do not paste them unchanged into Colab.</a:t>
+            </a:r>
+          </a:p>
+          <a:p xmlns:a="http://schemas.openxmlformats.org/drawingml/2006/main"/>
+          <a:p xmlns:a="http://schemas.openxmlformats.org/drawingml/2006/main">
+            <a:r>
+              <a:t>The last row matters most. A string that looks like a date is still just a string. Our Python fixture passes datetime objects with a UTC time zone through the driver, and MongoDB stores them as real BSON dates. In the shell, ISODate builds that kind of value. Neither call is legal strict JSON. That is the bottom line on the slide: MongoDB stores BSON, including typed dates that JSON strings do not create.</a:t>
+            </a:r>
+          </a:p>
+          <a:p xmlns:a="http://schemas.openxmlformats.org/drawingml/2006/main"/>
+          <a:p xmlns:a="http://schemas.openxmlformats.org/drawingml/2006/main">
+            <a:r>
+              <a:t>So when something fails, first ask which environment you are in. Plenty of apparent database errors are really language errors.</a:t>
+            </a:r>
+          </a:p>
+          <a:p xmlns:a="http://schemas.openxmlformats.org/drawingml/2006/main"/>
           <a:p xmlns:a="http://schemas.openxmlformats.org/drawingml/2006/main">
             <a:r>
               <a:t>Sources:</a:t>
@@ -3415,47 +2997,31 @@
           <a:lstStyle xmlns:a="http://schemas.openxmlformats.org/drawingml/2006/main"/>
           <a:p xmlns:a="http://schemas.openxmlformats.org/drawingml/2006/main">
             <a:r>
-              <a:t>These are the six tickets loaded by the notebook's setup cell. The table is small enough that we can reason about expected answers ourselves. That gives us a second way to check a query rather than accepting whatever the program prints.</a:t>
-            </a:r>
-          </a:p>
-          <a:p xmlns:a="http://schemas.openxmlformats.org/drawingml/2006/main">
-            <a:r>
-              <a:t/>
-            </a:r>
-          </a:p>
-          <a:p xmlns:a="http://schemas.openxmlformats.org/drawingml/2006/main">
-            <a:r>
-              <a:t>Ticket 1001 is a high-priority streetlight request and is open. Ticket 1003 has urgent priority, but it is already resolved. Ticket 1004 is new and low priority. Those differences matter when a filter combines status and priority. A high or urgent priority alone does not establish that a ticket belongs in an active queue.</a:t>
-            </a:r>
-          </a:p>
-          <a:p xmlns:a="http://schemas.openxmlformats.org/drawingml/2006/main">
-            <a:r>
-              <a:t/>
-            </a:r>
-          </a:p>
-          <a:p xmlns:a="http://schemas.openxmlformats.org/drawingml/2006/main">
-            <a:r>
-              <a:t>The notebook adapts the larger CSV case. It keeps selected fields, stores dates as Python datetime values for BSON conversion, and supplies nested requester details, tags, and small event arrays. Its event fields use the short names type and at. The original CSV uses event_type and event_at. The notebook explains that mapping rather than claiming it imported every original column unchanged.</a:t>
-            </a:r>
-          </a:p>
-          <a:p xmlns:a="http://schemas.openxmlformats.org/drawingml/2006/main">
-            <a:r>
-              <a:t/>
-            </a:r>
-          </a:p>
-          <a:p xmlns:a="http://schemas.openxmlformats.org/drawingml/2006/main">
-            <a:r>
-              <a:t>Some event arrays are empty in this teaching fixture. That tells us which events the fixture supplies. It does not establish that the source ticket never had any history. A small example needs a stated scope just as a production dataset does.</a:t>
-            </a:r>
-          </a:p>
-          <a:p xmlns:a="http://schemas.openxmlformats.org/drawingml/2006/main">
-            <a:r>
-              <a:t/>
-            </a:r>
-          </a:p>
-          <a:p xmlns:a="http://schemas.openxmlformats.org/drawingml/2006/main">
-            <a:r>
-              <a:t>We will later add ticket 1099 as a clearly marked disposable record. Keeping that test separate lets us check that an update or deletion leaves these six teaching tickets intact.</a:t>
+              <a:t>These are the six tickets the notebook's setup cell loads. Six is small on purpose. It is small enough that you can work out the right answer yourself before the program prints anything, and that gives you a second way to check a query instead of trusting whatever comes out.</a:t>
+            </a:r>
+          </a:p>
+          <a:p xmlns:a="http://schemas.openxmlformats.org/drawingml/2006/main"/>
+          <a:p xmlns:a="http://schemas.openxmlformats.org/drawingml/2006/main">
+            <a:r>
+              <a:t>Look at a few rows. Ticket 1001 is a high-priority streetlight request, and it is open. Ticket 1003 is urgent, the strongest priority on the slide, but look at its status: resolved. Ticket 1004 is new and low. Those combinations matter as soon as a filter mixes status and priority. A high or urgent priority does not, by itself, put a ticket in an active work queue. Keep an eye on 1003 and 1005, because each of them will be the ticket that teaches a lesson.</a:t>
+            </a:r>
+          </a:p>
+          <a:p xmlns:a="http://schemas.openxmlformats.org/drawingml/2006/main"/>
+          <a:p xmlns:a="http://schemas.openxmlformats.org/drawingml/2006/main">
+            <a:r>
+              <a:t>Read the note in the box. This is a small adaptation of the CSV case you used last week. It keeps selected fields, stores dates as Python datetime values so they become BSON dates, and adds nested requester details, tags, and short event arrays. The event fields are shortened to type and at, where the CSV says event_type and event_at. The notebook explains that mapping instead of pretending it imported every column unchanged.</a:t>
+            </a:r>
+          </a:p>
+          <a:p xmlns:a="http://schemas.openxmlformats.org/drawingml/2006/main"/>
+          <a:p xmlns:a="http://schemas.openxmlformats.org/drawingml/2006/main">
+            <a:r>
+              <a:t>Some event arrays are empty here. That tells you what this fixture supplies, not that the real ticket had no history.</a:t>
+            </a:r>
+          </a:p>
+          <a:p xmlns:a="http://schemas.openxmlformats.org/drawingml/2006/main"/>
+          <a:p xmlns:a="http://schemas.openxmlformats.org/drawingml/2006/main">
+            <a:r>
+              <a:t>Later we add ticket 1099, a clearly marked disposable record, so our write practice can never damage these six.</a:t>
             </a:r>
           </a:p>
         </p:txBody>
@@ -3525,54 +3091,40 @@
           <a:lstStyle xmlns:a="http://schemas.openxmlformats.org/drawingml/2006/main"/>
           <a:p xmlns:a="http://schemas.openxmlformats.org/drawingml/2006/main">
             <a:r>
-              <a:t>This is a complete Python query to run after the notebook's connection and fixture cells. We first assign a dictionary to filter_doc. The status condition accepts new, open, or in_progress. The priority condition accepts high or urgent. Both field conditions must hold for one document to match.</a:t>
-            </a:r>
-          </a:p>
-          <a:p xmlns:a="http://schemas.openxmlformats.org/drawingml/2006/main">
-            <a:r>
-              <a:t/>
-            </a:r>
-          </a:p>
-          <a:p xmlns:a="http://schemas.openxmlformats.org/drawingml/2006/main">
-            <a:r>
-              <a:t>That is why the result contains ticket 1001. It has status open and priority high. Ticket 1003 passes the priority condition but fails the status condition because it is resolved. Reading the filter as an intersection of requirements is more reliable than treating each line as an independent search whose results will somehow be combined later.</a:t>
-            </a:r>
-          </a:p>
-          <a:p xmlns:a="http://schemas.openxmlformats.org/drawingml/2006/main">
-            <a:r>
-              <a:t/>
-            </a:r>
-          </a:p>
-          <a:p xmlns:a="http://schemas.openxmlformats.org/drawingml/2006/main">
-            <a:r>
-              <a:t>The projection contains underscore id with zero and two requested fields with one. The result therefore displays ticket_id and status. Those projection settings do not remove category, priority, or the event array from the stored document. They only control what this find operation returns.</a:t>
-            </a:r>
-          </a:p>
-          <a:p xmlns:a="http://schemas.openxmlformats.org/drawingml/2006/main">
-            <a:r>
-              <a:t/>
-            </a:r>
-          </a:p>
-          <a:p xmlns:a="http://schemas.openxmlformats.org/drawingml/2006/main">
-            <a:r>
-              <a:t>The for loop iterates over the cursor from find and prints each returned document. On this fixture it prints one dictionary. If a filter returned three tickets, the loop would print three documents, still at the grain of one ticket per item.</a:t>
-            </a:r>
-          </a:p>
-          <a:p xmlns:a="http://schemas.openxmlformats.org/drawingml/2006/main">
-            <a:r>
-              <a:t/>
-            </a:r>
-          </a:p>
-          <a:p xmlns:a="http://schemas.openxmlformats.org/drawingml/2006/main">
-            <a:r>
-              <a:t>In the notebook, we compare this result with a SQL query over the same six tickets. SQL returns an ID and status in a row. MongoDB returns those fields in a document. Both identify ticket 1001. Your lab changes the question to an active lighting-and-sanitation queue, including medium-priority work. We will change the filter to match that requirement and keep priority visible in the output.</a:t>
-            </a:r>
-          </a:p>
-          <a:p xmlns:a="http://schemas.openxmlformats.org/drawingml/2006/main">
-            <a:r>
-              <a:t/>
-            </a:r>
-          </a:p>
+              <a:t>Now a complete Python query, run after the notebook's connection and fixture cells.</a:t>
+            </a:r>
+          </a:p>
+          <a:p xmlns:a="http://schemas.openxmlformats.org/drawingml/2006/main"/>
+          <a:p xmlns:a="http://schemas.openxmlformats.org/drawingml/2006/main">
+            <a:r>
+              <a:t>Look at filter_doc. It is a dictionary with two conditions. Status must be in the list new, open, or in_progress. Priority must be in the list high or urgent. Both conditions have to hold for the same document. Think of it as one set of requirements a ticket must pass, not two separate searches whose results get combined later.</a:t>
+            </a:r>
+          </a:p>
+          <a:p xmlns:a="http://schemas.openxmlformats.org/drawingml/2006/main"/>
+          <a:p xmlns:a="http://schemas.openxmlformats.org/drawingml/2006/main">
+            <a:r>
+              <a:t>Watch what comes back. One line: ticket_id 1001, status open. Why only 1001? It is open, and it is high. Now look at 1003. It passes the priority condition, because it is urgent, but it fails the status condition because it is resolved. That is the first line in the box: both conditions must hold.</a:t>
+            </a:r>
+          </a:p>
+          <a:p xmlns:a="http://schemas.openxmlformats.org/drawingml/2006/main"/>
+          <a:p xmlns:a="http://schemas.openxmlformats.org/drawingml/2006/main">
+            <a:r>
+              <a:t>Next, the projection. Underscore id is zero, ticket_id and status are one, so that is all we see. But the projection does not remove category, priority, or the events from the stored document. It only shapes what this find returns.</a:t>
+            </a:r>
+          </a:p>
+          <a:p xmlns:a="http://schemas.openxmlformats.org/drawingml/2006/main"/>
+          <a:p xmlns:a="http://schemas.openxmlformats.org/drawingml/2006/main">
+            <a:r>
+              <a:t>The for loop walks the cursor that find gives us and prints each document. Here that is one dictionary.</a:t>
+            </a:r>
+          </a:p>
+          <a:p xmlns:a="http://schemas.openxmlformats.org/drawingml/2006/main"/>
+          <a:p xmlns:a="http://schemas.openxmlformats.org/drawingml/2006/main">
+            <a:r>
+              <a:t>In the notebook, you also run the SQL version of this question over the same six tickets, and both identify ticket 1001. Your lab then changes the question to an active lighting and sanitation queue that includes medium-priority work, so you will change this filter and keep priority visible in the output.</a:t>
+            </a:r>
+          </a:p>
+          <a:p xmlns:a="http://schemas.openxmlformats.org/drawingml/2006/main"/>
           <a:p xmlns:a="http://schemas.openxmlformats.org/drawingml/2006/main">
             <a:r>
               <a:t>Sources:</a:t>
@@ -3650,54 +3202,28 @@
           <a:lstStyle xmlns:a="http://schemas.openxmlformats.org/drawingml/2006/main"/>
           <a:p xmlns:a="http://schemas.openxmlformats.org/drawingml/2006/main">
             <a:r>
-              <a:t>This query starts with the active statuses again, but now it returns opening time as well as ticket number. The sort expression contains two field-direction pairs. Opening time uses negative one, so later dates come first. Ticket number uses positive one as a tie breaker when two records have the same opening time.</a:t>
-            </a:r>
-          </a:p>
-          <a:p xmlns:a="http://schemas.openxmlformats.org/drawingml/2006/main">
-            <a:r>
-              <a:t/>
-            </a:r>
-          </a:p>
-          <a:p xmlns:a="http://schemas.openxmlformats.org/drawingml/2006/main">
-            <a:r>
-              <a:t>The limit is two. In our fixture, the most recent active ticket is 1006, followed by 1004. Notice that 1005 has a recent opening time, but it is resolved and does not pass the filter. Sorting does not rescue a document that failed the predicate.</a:t>
-            </a:r>
-          </a:p>
-          <a:p xmlns:a="http://schemas.openxmlformats.org/drawingml/2006/main">
-            <a:r>
-              <a:t/>
-            </a:r>
-          </a:p>
-          <a:p xmlns:a="http://schemas.openxmlformats.org/drawingml/2006/main">
-            <a:r>
-              <a:t>Find gives us a cursor. We configure that cursor with sorting and a limit before iterating. The loop then retrieves its results. After the loop has consumed the cursor, looping over that same exhausted cursor does not execute a new independent query. Calling find again creates another query cursor. For a small bounded result, converting a cursor to a list can also be convenient, as we will do in the page demonstration.</a:t>
-            </a:r>
-          </a:p>
-          <a:p xmlns:a="http://schemas.openxmlformats.org/drawingml/2006/main">
-            <a:r>
-              <a:t/>
-            </a:r>
-          </a:p>
-          <a:p xmlns:a="http://schemas.openxmlformats.org/drawingml/2006/main">
-            <a:r>
-              <a:t>A deterministic tie breaker helps us explain an order instead of relying on incidental storage order. It is especially useful for repeated observations and pagination, although building a production pagination system requires further choices.</a:t>
-            </a:r>
-          </a:p>
-          <a:p xmlns:a="http://schemas.openxmlformats.org/drawingml/2006/main">
-            <a:r>
-              <a:t/>
-            </a:r>
-          </a:p>
-          <a:p xmlns:a="http://schemas.openxmlformats.org/drawingml/2006/main">
-            <a:r>
-              <a:t>The sort and limit change the query result. They do not reorder the collection permanently or delete records beyond the limit.</a:t>
-            </a:r>
-          </a:p>
-          <a:p xmlns:a="http://schemas.openxmlformats.org/drawingml/2006/main">
-            <a:r>
-              <a:t/>
-            </a:r>
-          </a:p>
+              <a:t>Same active statuses, but now we return the opening time along with the ticket number. Look at the sort. It is a list of two pairs. opened_at with negative one, so the newest opening comes first. Then ticket_id with positive one, as a tie breaker if two tickets opened at the same moment.</a:t>
+            </a:r>
+          </a:p>
+          <a:p xmlns:a="http://schemas.openxmlformats.org/drawingml/2006/main"/>
+          <a:p xmlns:a="http://schemas.openxmlformats.org/drawingml/2006/main">
+            <a:r>
+              <a:t>The limit is two. Watch the result: 1006, then 1004. Now notice what is missing. Ticket 1005 opened recently too, but it is resolved, so it never passed the filter. Sorting does not rescue a document that failed the predicate. The filter decides what qualifies, and only then does the sort put it in order.</a:t>
+            </a:r>
+          </a:p>
+          <a:p xmlns:a="http://schemas.openxmlformats.org/drawingml/2006/main"/>
+          <a:p xmlns:a="http://schemas.openxmlformats.org/drawingml/2006/main">
+            <a:r>
+              <a:t>find does not hand you a list. It hands you a cursor. We attach the sort and the limit to the cursor, and then the loop reads the results. Once the loop has gone through the cursor, it is used up. Loop over that same cursor again and you get nothing, because it does not rerun the query. That is the note at the bottom: to repeat a consumed query, call find again. For a small bounded result, wrapping it in list is convenient, and we do that on Day 2.</a:t>
+            </a:r>
+          </a:p>
+          <a:p xmlns:a="http://schemas.openxmlformats.org/drawingml/2006/main"/>
+          <a:p xmlns:a="http://schemas.openxmlformats.org/drawingml/2006/main">
+            <a:r>
+              <a:t>Why bother with a tie breaker? Without one, the order of ties depends on incidental storage order, and you cannot explain it or repeat it. And remember, sort and limit shape this result. They do not reorder or trim the collection.</a:t>
+            </a:r>
+          </a:p>
+          <a:p xmlns:a="http://schemas.openxmlformats.org/drawingml/2006/main"/>
           <a:p xmlns:a="http://schemas.openxmlformats.org/drawingml/2006/main">
             <a:r>
               <a:t>Sources:</a:t>
@@ -3775,54 +3301,34 @@
           <a:lstStyle xmlns:a="http://schemas.openxmlformats.org/drawingml/2006/main"/>
           <a:p xmlns:a="http://schemas.openxmlformats.org/drawingml/2006/main">
             <a:r>
-              <a:t>The first query reaches into a nested requester document. The dotted field name requester.user_id means that we look for user_id inside requester. The field name is a quoted string because the dot is part of the MongoDB path, not Python attribute access on a variable called requester.</a:t>
-            </a:r>
-          </a:p>
-          <a:p xmlns:a="http://schemas.openxmlformats.org/drawingml/2006/main">
-            <a:r>
-              <a:t/>
-            </a:r>
-          </a:p>
-          <a:p xmlns:a="http://schemas.openxmlformats.org/drawingml/2006/main">
-            <a:r>
-              <a:t>On our fixture, user 101 requested tickets 1001 and 1005. The projection asks for only their ticket IDs. We can compare those IDs with the requester objects in the fixture to verify the relationship.</a:t>
-            </a:r>
-          </a:p>
-          <a:p xmlns:a="http://schemas.openxmlformats.org/drawingml/2006/main">
-            <a:r>
-              <a:t/>
-            </a:r>
-          </a:p>
-          <a:p xmlns:a="http://schemas.openxmlformats.org/drawingml/2006/main">
-            <a:r>
-              <a:t>The second query searches the tags array. A scalar equality condition on that array field matches a document when its array contains the value safety. We do not need the entire array to equal the string safety. Here, tickets 1001 and 1005 both carry that tag, so the two queries happen to return the same IDs for different reasons.</a:t>
-            </a:r>
-          </a:p>
-          <a:p xmlns:a="http://schemas.openxmlformats.org/drawingml/2006/main">
-            <a:r>
-              <a:t/>
-            </a:r>
-          </a:p>
-          <a:p xmlns:a="http://schemas.openxmlformats.org/drawingml/2006/main">
-            <a:r>
-              <a:t>That agreement does not make the conditions equivalent. A future ticket might belong to user 101 without a safety tag, or have the safety tag while belonging to a different requester. A database query states a rule, and the fixture is just one set of data against which we observe it.</a:t>
-            </a:r>
-          </a:p>
-          <a:p xmlns:a="http://schemas.openxmlformats.org/drawingml/2006/main">
-            <a:r>
-              <a:t/>
-            </a:r>
-          </a:p>
-          <a:p xmlns:a="http://schemas.openxmlformats.org/drawingml/2006/main">
-            <a:r>
-              <a:t>The next example makes this distinction more important. Once an array contains documents, different conditions may be satisfied by different elements unless we explicitly require one qualifying element.</a:t>
-            </a:r>
-          </a:p>
-          <a:p xmlns:a="http://schemas.openxmlformats.org/drawingml/2006/main">
-            <a:r>
-              <a:t/>
-            </a:r>
-          </a:p>
+              <a:t>Two queries on this slide. The first one reaches into a nested document. Each ticket has a requester object, and inside it a user_id. The dotted name requester.user_id says: look inside requester for user_id. Notice it is in quotes. The dot belongs to MongoDB's path, so it is a string, not Python reaching into a variable called requester.</a:t>
+            </a:r>
+          </a:p>
+          <a:p xmlns:a="http://schemas.openxmlformats.org/drawingml/2006/main"/>
+          <a:p xmlns:a="http://schemas.openxmlformats.org/drawingml/2006/main">
+            <a:r>
+              <a:t>On our fixture, user 101 requested tickets 1001 and 1005, and that is what prints. You can confirm it by looking at the requester objects in the fixture yourself.</a:t>
+            </a:r>
+          </a:p>
+          <a:p xmlns:a="http://schemas.openxmlformats.org/drawingml/2006/main"/>
+          <a:p xmlns:a="http://schemas.openxmlformats.org/drawingml/2006/main">
+            <a:r>
+              <a:t>The second query searches the tags array. We write tags equals safety, as if tags were a single value. When the field is an array, MongoDB treats that as: does the array contain safety? The whole array does not have to equal the word safety. Tickets 1001 and 1005 both carry that tag.</a:t>
+            </a:r>
+          </a:p>
+          <a:p xmlns:a="http://schemas.openxmlformats.org/drawingml/2006/main"/>
+          <a:p xmlns:a="http://schemas.openxmlformats.org/drawingml/2006/main">
+            <a:r>
+              <a:t>Now read the result box. Both queries return 1001 and 1005, for different reasons. That agreement is a coincidence of this data. Tomorrow user 101 could open a ticket with no safety tag, or someone else could file a safety ticket. A query states a rule. The fixture is just one set of data we watch it run against.</a:t>
+            </a:r>
+          </a:p>
+          <a:p xmlns:a="http://schemas.openxmlformats.org/drawingml/2006/main"/>
+          <a:p xmlns:a="http://schemas.openxmlformats.org/drawingml/2006/main">
+            <a:r>
+              <a:t>Hold on to that idea, because the next slide makes it sharper. Once an array holds documents instead of plain words, two conditions can be satisfied by two different elements, unless we explicitly require one element to satisfy both.</a:t>
+            </a:r>
+          </a:p>
+          <a:p xmlns:a="http://schemas.openxmlformats.org/drawingml/2006/main"/>
           <a:p xmlns:a="http://schemas.openxmlformats.org/drawingml/2006/main">
             <a:r>
               <a:t>Sources:</a:t>
@@ -14532,7 +14038,7 @@
                 <a:ea typeface="Helvetica Neue"/>
                 <a:cs typeface="Helvetica Neue"/>
               </a:rPr>
-              <a:t>Worked demo: open, Maya Chen, then event IDs [5002, 5001].</a:t>
+              <a:t>Worked demo: open, Requester 101, then event IDs [5002, 5001].</a:t>
             </a:r>
           </a:p>
           <a:p xmlns:a="http://schemas.openxmlformats.org/drawingml/2006/main">
